--- a/lecons/USA/Population Geography/15_USA_POP_L11_The_Modern_Demographic_Explosion_and_Population_Policies.pptx
+++ b/lecons/USA/Population Geography/15_USA_POP_L11_The_Modern_Demographic_Explosion_and_Population_Policies.pptx
@@ -72,9 +72,10 @@
     <p:sldId id="320" r:id="rId66"/>
     <p:sldId id="321" r:id="rId67"/>
     <p:sldId id="322" r:id="rId68"/>
+    <p:sldId id="323" r:id="rId69"/>
   </p:sldIdLst>
   <p:notesMasterIdLst>
-    <p:notesMasterId r:id="rId69"/>
+    <p:notesMasterId r:id="rId70"/>
   </p:notesMasterIdLst>
   <p:sldSz cx="12192000" cy="6858000"/>
   <p:notesSz cx="6858000" cy="12192000"/>
@@ -3296,7 +3297,7 @@
           <a:p>
             <a:r>
               <a:rPr lang="en-US" dirty="0"/>
-              <a:t>We continue with the definitions. On this slide we have Anti-natalist policy. Write each point on a new line, with the key term first, and explain it in your own words when we revise.</a:t>
+              <a:t>We continue with the definitions. On this slide we have Anti-natalist policy and Migration law. Write each point on a new line, with the key term first, and explain it in your own words when we revise.</a:t>
             </a:r>
             <a:endParaRPr lang="en-US" dirty="0"/>
           </a:p>
@@ -3384,7 +3385,7 @@
           <a:p>
             <a:r>
               <a:rPr lang="en-US" dirty="0"/>
-              <a:t>Let us copy Causes. The causes of the demographic explosion are the following. Copy the point on Scale on the left, then draw the diagram on the right: the billions of people. Give it a title and label it clearly.</a:t>
+              <a:t>Let us copy Causes. The demographic explosion has the following causes. Copy the point on Improved medical care on the left, then draw the diagram on the right: vaccination. Give it a title and label it clearly.</a:t>
             </a:r>
             <a:endParaRPr lang="en-US" dirty="0"/>
           </a:p>
@@ -3560,7 +3561,7 @@
           <a:p>
             <a:r>
               <a:rPr lang="en-US" dirty="0"/>
-              <a:t>Copy the point on Improved medical care on the left, then draw the diagram on the right: vaccination. Give it a title and label it clearly.</a:t>
+              <a:t>We continue with Causes. Copy the point on Improved sanitation: write the key term first, then its explanation.</a:t>
             </a:r>
             <a:endParaRPr lang="en-US" dirty="0"/>
           </a:p>
@@ -3648,7 +3649,7 @@
           <a:p>
             <a:r>
               <a:rPr lang="en-US" dirty="0"/>
-              <a:t>We continue with Causes. On this slide we have Improved sanitation and More food. Write each point on a new line, with the key term first, and explain it in your own words when we revise. When you finish, we go to the next slide.</a:t>
+              <a:t>We continue with Causes. Copy the point on More food: write the key term first, then its explanation.</a:t>
             </a:r>
             <a:endParaRPr lang="en-US" dirty="0"/>
           </a:p>
@@ -3736,7 +3737,7 @@
           <a:p>
             <a:r>
               <a:rPr lang="en-US" dirty="0"/>
-              <a:t>We continue with Causes. On this slide we have High birth rates. Write each point on a new line, with the key term first, and explain it in your own words when we revise.</a:t>
+              <a:t>We continue with Causes. Copy the point on High birth rates: write the key term first, then its explanation.</a:t>
             </a:r>
             <a:endParaRPr lang="en-US" dirty="0"/>
           </a:p>
@@ -3824,7 +3825,7 @@
           <a:p>
             <a:r>
               <a:rPr lang="en-US" dirty="0"/>
-              <a:t>Let us copy Consequences. The consequences of the demographic explosion are the following. On this slide we have Positive consequences. Write each point on a new line, with the key term first, and explain it in your own words when we revise.</a:t>
+              <a:t>Let us copy Consequences. The demographic explosion has the following consequences. Copy the point on A large labour force and market: write the key term first, then its explanation.</a:t>
             </a:r>
             <a:endParaRPr lang="en-US" dirty="0"/>
           </a:p>
@@ -3912,7 +3913,7 @@
           <a:p>
             <a:r>
               <a:rPr lang="en-US" dirty="0"/>
-              <a:t>Copy the point on Pressure on resources on the left, then draw the diagram on the right: firewood and charcoal. Give it a title and label it clearly.</a:t>
+              <a:t>Copy the point on Pressure on resources on the left, then draw the diagram on the right: charcoal. Give it a title and label it clearly.</a:t>
             </a:r>
             <a:endParaRPr lang="en-US" dirty="0"/>
           </a:p>
@@ -4000,7 +4001,7 @@
           <a:p>
             <a:r>
               <a:rPr lang="en-US" dirty="0"/>
-              <a:t>We continue with Consequences. On this slide we have Environmental damage and Unemployment. Write each point on a new line, with the key term first, and explain it in your own words when we revise.</a:t>
+              <a:t>We continue with Consequences. Copy the point on Environmental damage: write the key term first, then its explanation.</a:t>
             </a:r>
             <a:endParaRPr lang="en-US" dirty="0"/>
           </a:p>
@@ -4088,7 +4089,7 @@
           <a:p>
             <a:r>
               <a:rPr lang="en-US" dirty="0"/>
-              <a:t>Copy the point on Overcrowding on the left, then draw the diagram on the right: consequences of rapid growth. Give it a title and label it clearly.</a:t>
+              <a:t>Copy the point on Unemployment and overcrowding on the left, then draw the diagram on the right: the consequences of the explosion. Give it a title and label it clearly.</a:t>
             </a:r>
             <a:endParaRPr lang="en-US" dirty="0"/>
           </a:p>
@@ -4176,7 +4177,7 @@
           <a:p>
             <a:r>
               <a:rPr lang="en-US" dirty="0"/>
-              <a:t>Let us copy Pro-Natalist Policies. Pro-natalist policies are presented as follows. Copy the point on Aim on the left, then draw the diagram on the right: population policies. Give it a title and label it clearly.</a:t>
+              <a:t>Let us copy Pro-Natal Policies. Pro-natal policies are applied as follows. Copy the point on Aim on the left, then draw the diagram on the right: population policies. Give it a title and label it clearly.</a:t>
             </a:r>
             <a:endParaRPr lang="en-US" dirty="0"/>
           </a:p>
@@ -4264,7 +4265,7 @@
           <a:p>
             <a:r>
               <a:rPr lang="en-US" dirty="0"/>
-              <a:t>We continue with Pro-Natalist Policies. On this slide we have Example of France. Write each point on a new line, with the key term first, and explain it in your own words when we revise. When you finish, we go to the next slide.</a:t>
+              <a:t>We continue with Pro-Natal Policies. Copy the point on Example of France: write the key term first, then its explanation.</a:t>
             </a:r>
             <a:endParaRPr lang="en-US" dirty="0"/>
           </a:p>
@@ -4352,7 +4353,7 @@
           <a:p>
             <a:r>
               <a:rPr lang="en-US" dirty="0"/>
-              <a:t>We continue with Pro-Natalist Policies. On this slide we have Other examples. Write each point on a new line, with the key term first, and explain it in your own words when we revise.</a:t>
+              <a:t>We continue with Pro-Natal Policies. Copy the point on Other examples: write the key term first, then its explanation.</a:t>
             </a:r>
             <a:endParaRPr lang="en-US" dirty="0"/>
           </a:p>
@@ -4528,7 +4529,7 @@
           <a:p>
             <a:r>
               <a:rPr lang="en-US" dirty="0"/>
-              <a:t>Let us copy Anti-Natalist Policies: the Chinese Experience. The Chinese anti-natalist policy is presented as follows. On this slide we have Aim. Write each point on a new line, with the key term first, and explain it in your own words when we revise.</a:t>
+              <a:t>Let us copy Anti-Natal Policies: the Chinese Experience. The Chinese anti-natal policy was applied as follows. Copy the point on The one-child policy on the left, then draw the diagram on the right: the one-child policy. Give it a title and label it clearly.</a:t>
             </a:r>
             <a:endParaRPr lang="en-US" dirty="0"/>
           </a:p>
@@ -4616,7 +4617,7 @@
           <a:p>
             <a:r>
               <a:rPr lang="en-US" dirty="0"/>
-              <a:t>Copy the point on The one-child policy on the left, then draw the diagram on the right: a family policy poster. Give it a title and label it clearly.</a:t>
+              <a:t>We continue with Anti-Natal Policies: the Chinese Experience. Copy the point on Incentives and penalties: write the key term first, then its explanation.</a:t>
             </a:r>
             <a:endParaRPr lang="en-US" dirty="0"/>
           </a:p>
@@ -4704,7 +4705,7 @@
           <a:p>
             <a:r>
               <a:rPr lang="en-US" dirty="0"/>
-              <a:t>We continue with Anti-Natalist Policies: the Chinese Experience. On this slide we have Incentives and penalties and Results. Write each point on a new line, with the key term first, and explain it in your own words when we revise. When you finish, we go to the next slide.</a:t>
+              <a:t>We continue with Anti-Natal Policies: the Chinese Experience. Copy the point on Positive results: write the key term first, then its explanation.</a:t>
             </a:r>
             <a:endParaRPr lang="en-US" dirty="0"/>
           </a:p>
@@ -4792,7 +4793,7 @@
           <a:p>
             <a:r>
               <a:rPr lang="en-US" dirty="0"/>
-              <a:t>We continue with Anti-Natalist Policies: the Chinese Experience. Copy this carefully.</a:t>
+              <a:t>We continue with Anti-Natal Policies: the Chinese Experience. Copy the point on Negative results: write the key term first, then its explanation.</a:t>
             </a:r>
             <a:endParaRPr lang="en-US" dirty="0"/>
           </a:p>
@@ -4880,7 +4881,7 @@
           <a:p>
             <a:r>
               <a:rPr lang="en-US" dirty="0"/>
-              <a:t>Let us copy Migration Laws. Migration laws are used as follows. On this slide we have Restrictive policies. Write each point on a new line, with the key term first, and explain it in your own words when we revise. When you finish, we go to the next slide.</a:t>
+              <a:t>Let us copy Migration Laws: the US and Canadian Cases. Migration laws are applied in the following ways. Copy the point on Restrictive laws, the United States: write the key term first, then its explanation.</a:t>
             </a:r>
             <a:endParaRPr lang="en-US" dirty="0"/>
           </a:p>
@@ -4968,7 +4969,7 @@
           <a:p>
             <a:r>
               <a:rPr lang="en-US" dirty="0"/>
-              <a:t>We continue with Migration Laws. On this slide we have Selective policies and Aim. Write each point on a new line, with the key term first, and explain it in your own words when we revise.</a:t>
+              <a:t>We continue with Migration Laws: the US and Canadian Cases. Copy the point on Relaxed and selective laws, Canada: write the key term first, then its explanation.</a:t>
             </a:r>
             <a:endParaRPr lang="en-US" dirty="0"/>
           </a:p>
@@ -5056,7 +5057,7 @@
           <a:p>
             <a:r>
               <a:rPr lang="en-US" dirty="0"/>
-              <a:t>Now let us check what you have understood. Question 1: Give two causes of the modern demographic explosion. Answer in your exercise book.</a:t>
+              <a:t>We continue with Migration Laws: the US and Canadian Cases. Copy the point on Aim of migration laws: write the key term first, then its explanation.</a:t>
             </a:r>
             <a:endParaRPr lang="en-US" dirty="0"/>
           </a:p>
@@ -5144,7 +5145,7 @@
           <a:p>
             <a:r>
               <a:rPr lang="en-US" dirty="0"/>
-              <a:t>The expected answer is: better medicine and sanitation, more food (Green Revolution), high birth rates in developing countries (any two). If you got it right, well done.</a:t>
+              <a:t>Now let us check what you have understood. Question 1: Give two causes of the modern demographic explosion. Answer in your exercise book.</a:t>
             </a:r>
             <a:endParaRPr lang="en-US" dirty="0"/>
           </a:p>
@@ -5232,7 +5233,7 @@
           <a:p>
             <a:r>
               <a:rPr lang="en-US" dirty="0"/>
-              <a:t>Now let us check what you have understood. Question 2: Why would Japan adopt a pro-natalist policy and Niger an anti-natalist policy? Answer in your exercise book.</a:t>
+              <a:t>The expected answer is: better medicine and sanitation, more food (Green Revolution), high birth rates in developing countries (any two). If you got it right, well done.</a:t>
             </a:r>
             <a:endParaRPr lang="en-US" dirty="0"/>
           </a:p>
@@ -5320,7 +5321,7 @@
           <a:p>
             <a:r>
               <a:rPr lang="en-US" dirty="0"/>
-              <a:t>The expected answer is: japan has low births and an ageing population; Niger has very high births and rapid growth. If you got it right, well done.</a:t>
+              <a:t>Now let us check what you have understood. Question 2: Why would Japan adopt a pro-natalist policy and Niger an anti-natalist policy? Answer in your exercise book.</a:t>
             </a:r>
             <a:endParaRPr lang="en-US" dirty="0"/>
           </a:p>
@@ -5496,7 +5497,7 @@
           <a:p>
             <a:r>
               <a:rPr lang="en-US" dirty="0"/>
-              <a:t>For those who need more practice, fill in the blanks in your exercise book. The answers are: number 1, pro-natalist; number 2, 2015; number 3, points-based.</a:t>
+              <a:t>The expected answer is: japan has low births and an ageing population; Niger has very high births and rapid growth. If you got it right, well done.</a:t>
             </a:r>
             <a:endParaRPr lang="en-US" dirty="0"/>
           </a:p>
@@ -5584,7 +5585,7 @@
           <a:p>
             <a:r>
               <a:rPr lang="en-US" dirty="0"/>
-              <a:t>For your homework: Name the five stages of the demographic transition model. We shall correct it at the beginning of our next lesson.</a:t>
+              <a:t>For those who need more practice, fill in the blanks in your exercise book. The answers are: number 1, pro-natalist; number 2, 2015; number 3, points-based.</a:t>
             </a:r>
             <a:endParaRPr lang="en-US" dirty="0"/>
           </a:p>
@@ -5672,7 +5673,7 @@
           <a:p>
             <a:r>
               <a:rPr lang="en-US" dirty="0"/>
-              <a:t>Our next lesson will be on Lesson 12: The Demographic Transition Model. Thank you for your attention, and see you next time.</a:t>
+              <a:t>For your homework: Name the five stages of the demographic transition model. We shall correct it at the beginning of our next lesson.</a:t>
             </a:r>
             <a:endParaRPr lang="en-US" dirty="0"/>
           </a:p>
@@ -5760,7 +5761,7 @@
           <a:p>
             <a:r>
               <a:rPr lang="en-US" dirty="0"/>
-              <a:t>Let us play the bilingual game. I say a word in English, and you give me the French word. Then we do the reverse.</a:t>
+              <a:t>Our next lesson will be on Lesson 12: The Demographic Transition Model. Thank you for your attention, and see you next time.</a:t>
             </a:r>
             <a:endParaRPr lang="en-US" dirty="0"/>
           </a:p>
@@ -5848,7 +5849,7 @@
           <a:p>
             <a:r>
               <a:rPr lang="en-US" dirty="0"/>
-              <a:t>I record this information in the official logbook of the class after the lesson.</a:t>
+              <a:t>Let us play the bilingual game. I say a word in English, and you give me the French word. Then we do the reverse.</a:t>
             </a:r>
             <a:endParaRPr lang="en-US" dirty="0"/>
           </a:p>
@@ -5936,7 +5937,7 @@
           <a:p>
             <a:r>
               <a:rPr lang="en-US" dirty="0"/>
-              <a:t>I complete the second page of the logbook: the matter taught, the evaluation, the homework and the attendance.</a:t>
+              <a:t>I record this information in the official logbook of the class after the lesson.</a:t>
             </a:r>
             <a:endParaRPr lang="en-US" dirty="0"/>
           </a:p>
@@ -6024,7 +6025,7 @@
           <a:p>
             <a:r>
               <a:rPr lang="en-US" dirty="0"/>
-              <a:t>This slide is for me, the teacher: it gives the timing of the lesson and what to do if the projector is not available.</a:t>
+              <a:t>I complete the second page of the logbook: the matter taught, the evaluation, the homework and the attendance.</a:t>
             </a:r>
             <a:endParaRPr lang="en-US" dirty="0"/>
           </a:p>
@@ -6112,7 +6113,7 @@
           <a:p>
             <a:r>
               <a:rPr lang="en-US" dirty="0"/>
-              <a:t>These are the references and picture credits used to prepare this lesson.</a:t>
+              <a:t>This slide is for me, the teacher: it gives the timing of the lesson and what to do if the projector is not available.</a:t>
             </a:r>
             <a:endParaRPr lang="en-US" dirty="0"/>
           </a:p>
@@ -6136,6 +6137,94 @@
             <a:fld id="{F7021451-1387-4CA6-816F-3879F97B5CBC}" type="slidenum">
               <a:rPr lang="en-US"/>
               <a:t>67</a:t>
+            </a:fld>
+            <a:endParaRPr lang="en-US"/>
+          </a:p>
+        </p:txBody>
+      </p:sp>
+    </p:spTree>
+    <p:extLst>
+      <p:ext uri="{BB962C8B-B14F-4D97-AF65-F5344CB8AC3E}">
+        <p14:creationId xmlns:p14="http://schemas.microsoft.com/office/powerpoint/2010/main" val="1024086991"/>
+      </p:ext>
+    </p:extLst>
+  </p:cSld>
+  <p:clrMapOvr>
+    <a:masterClrMapping/>
+  </p:clrMapOvr>
+</p:notes>
+</file>
+
+<file path=ppt/notesSlides/notesSlide68.xml><?xml version="1.0" encoding="utf-8"?>
+<p:notes xmlns:a="http://schemas.openxmlformats.org/drawingml/2006/main" xmlns:r="http://schemas.openxmlformats.org/officeDocument/2006/relationships" xmlns:p="http://schemas.openxmlformats.org/presentationml/2006/main">
+  <p:cSld>
+    <p:spTree>
+      <p:nvGrpSpPr>
+        <p:cNvPr id="1" name=""/>
+        <p:cNvGrpSpPr/>
+        <p:nvPr/>
+      </p:nvGrpSpPr>
+      <p:grpSpPr>
+        <a:xfrm>
+          <a:off x="0" y="0"/>
+          <a:ext cx="0" cy="0"/>
+          <a:chOff x="0" y="0"/>
+          <a:chExt cx="0" cy="0"/>
+        </a:xfrm>
+      </p:grpSpPr>
+      <p:sp>
+        <p:nvSpPr>
+          <p:cNvPr id="2" name="Slide Image Placeholder 1"/>
+          <p:cNvSpPr>
+            <a:spLocks noGrp="1" noRot="1" noChangeAspect="1"/>
+          </p:cNvSpPr>
+          <p:nvPr>
+            <p:ph type="sldImg"/>
+          </p:nvPr>
+        </p:nvSpPr>
+        <p:spPr/>
+      </p:sp>
+      <p:sp>
+        <p:nvSpPr>
+          <p:cNvPr id="3" name="Notes Placeholder 2"/>
+          <p:cNvSpPr>
+            <a:spLocks noGrp="1"/>
+          </p:cNvSpPr>
+          <p:nvPr>
+            <p:ph type="body" idx="1"/>
+          </p:nvPr>
+        </p:nvSpPr>
+        <p:spPr/>
+        <p:txBody>
+          <a:bodyPr/>
+          <a:lstStyle/>
+          <a:p>
+            <a:r>
+              <a:rPr lang="en-US" dirty="0"/>
+              <a:t>These are the references and picture credits used to prepare this lesson.</a:t>
+            </a:r>
+            <a:endParaRPr lang="en-US" dirty="0"/>
+          </a:p>
+        </p:txBody>
+      </p:sp>
+      <p:sp>
+        <p:nvSpPr>
+          <p:cNvPr id="4" name="Slide Number Placeholder 3"/>
+          <p:cNvSpPr>
+            <a:spLocks noGrp="1"/>
+          </p:cNvSpPr>
+          <p:nvPr>
+            <p:ph type="sldNum" sz="quarter" idx="10"/>
+          </p:nvPr>
+        </p:nvSpPr>
+        <p:spPr/>
+        <p:txBody>
+          <a:bodyPr/>
+          <a:lstStyle/>
+          <a:p>
+            <a:fld id="{F7021451-1387-4CA6-816F-3879F97B5CBC}" type="slidenum">
+              <a:rPr lang="en-US"/>
+              <a:t>68</a:t>
             </a:fld>
             <a:endParaRPr lang="en-US"/>
           </a:p>
@@ -15706,6 +15795,43 @@
             </a:r>
             <a:endParaRPr lang="en-US" sz="4000" dirty="0"/>
           </a:p>
+          <a:p>
+            <a:pPr algn="l" indent="0" marL="0">
+              <a:spcAft>
+                <a:spcPts val="800"/>
+              </a:spcAft>
+              <a:buNone/>
+            </a:pPr>
+            <a:r>
+              <a:rPr lang="en-US" sz="4000" b="1" dirty="0">
+                <a:solidFill>
+                  <a:srgbClr val="111111"/>
+                </a:solidFill>
+                <a:latin typeface="Times New Roman" pitchFamily="34" charset="0"/>
+                <a:ea typeface="Times New Roman" pitchFamily="34" charset="-122"/>
+                <a:cs typeface="Times New Roman" pitchFamily="34" charset="-120"/>
+              </a:rPr>
+              <a:t>Migration law: </a:t>
+            </a:r>
+            <a:pPr algn="l" indent="0" marL="0">
+              <a:spcAft>
+                <a:spcPts val="800"/>
+              </a:spcAft>
+              <a:buNone/>
+            </a:pPr>
+            <a:r>
+              <a:rPr lang="en-US" sz="4000" dirty="0">
+                <a:solidFill>
+                  <a:srgbClr val="111111"/>
+                </a:solidFill>
+                <a:latin typeface="Times New Roman" pitchFamily="34" charset="0"/>
+                <a:ea typeface="Times New Roman" pitchFamily="34" charset="-122"/>
+                <a:cs typeface="Times New Roman" pitchFamily="34" charset="-120"/>
+              </a:rPr>
+              <a:t>It is a law that controls who may enter, live and work in a country.</a:t>
+            </a:r>
+            <a:endParaRPr lang="en-US" sz="4000" dirty="0"/>
+          </a:p>
         </p:txBody>
       </p:sp>
       <p:sp>
@@ -15870,7 +15996,7 @@
         <p:spPr>
           <a:xfrm>
             <a:off x="365760" y="1737360"/>
-            <a:ext cx="5120640" cy="457200"/>
+            <a:ext cx="6035040" cy="457200"/>
           </a:xfrm>
           <a:prstGeom prst="rect">
             <a:avLst/>
@@ -15911,7 +16037,7 @@
         <p:spPr>
           <a:xfrm>
             <a:off x="365760" y="2240280"/>
-            <a:ext cx="4846320" cy="4160520"/>
+            <a:ext cx="6035040" cy="4160520"/>
           </a:xfrm>
           <a:prstGeom prst="rect">
             <a:avLst/>
@@ -15930,7 +16056,7 @@
               <a:buNone/>
             </a:pPr>
             <a:r>
-              <a:rPr lang="en-US" sz="3200" i="1" dirty="0">
+              <a:rPr lang="en-US" sz="3000" i="1" dirty="0">
                 <a:solidFill>
                   <a:srgbClr val="111111"/>
                 </a:solidFill>
@@ -15938,9 +16064,9 @@
                 <a:ea typeface="Times New Roman" pitchFamily="34" charset="-122"/>
                 <a:cs typeface="Times New Roman" pitchFamily="34" charset="-120"/>
               </a:rPr>
-              <a:t>The causes of the demographic explosion are the following:</a:t>
-            </a:r>
-            <a:endParaRPr lang="en-US" sz="3200" dirty="0"/>
+              <a:t>The demographic explosion has the following causes:</a:t>
+            </a:r>
+            <a:endParaRPr lang="en-US" sz="3000" dirty="0"/>
           </a:p>
           <a:p>
             <a:pPr algn="l" indent="0" marL="0">
@@ -15950,7 +16076,7 @@
               <a:buNone/>
             </a:pPr>
             <a:r>
-              <a:rPr lang="en-US" sz="3200" b="1" dirty="0">
+              <a:rPr lang="en-US" sz="3000" b="1" dirty="0">
                 <a:solidFill>
                   <a:srgbClr val="111111"/>
                 </a:solidFill>
@@ -15958,7 +16084,7 @@
                 <a:ea typeface="Times New Roman" pitchFamily="34" charset="-122"/>
                 <a:cs typeface="Times New Roman" pitchFamily="34" charset="-120"/>
               </a:rPr>
-              <a:t>Scale: </a:t>
+              <a:t>Improved medical care: </a:t>
             </a:r>
             <a:pPr algn="l" indent="0" marL="0">
               <a:spcAft>
@@ -15967,7 +16093,7 @@
               <a:buNone/>
             </a:pPr>
             <a:r>
-              <a:rPr lang="en-US" sz="3200" dirty="0">
+              <a:rPr lang="en-US" sz="3000" dirty="0">
                 <a:solidFill>
                   <a:srgbClr val="111111"/>
                 </a:solidFill>
@@ -15975,15 +16101,15 @@
                 <a:ea typeface="Times New Roman" pitchFamily="34" charset="-122"/>
                 <a:cs typeface="Times New Roman" pitchFamily="34" charset="-120"/>
               </a:rPr>
-              <a:t>The world population rose from about 1.6 billion in 1900 to more than 8 billion today.</a:t>
-            </a:r>
-            <a:endParaRPr lang="en-US" sz="3200" dirty="0"/>
+              <a:t>Vaccines, antibiotics and better surgery reduced deaths from diseases. As a result, the world population rose from about 1.6 billion in 1900 to more than 8 billion today.</a:t>
+            </a:r>
+            <a:endParaRPr lang="en-US" sz="3000" dirty="0"/>
           </a:p>
         </p:txBody>
       </p:sp>
       <p:pic>
         <p:nvPicPr>
-          <p:cNvPr id="6" name="Image 0" descr="/home/claude/f4/img/v2/pop2_milestones.png">    </p:cNvPr>
+          <p:cNvPr id="6" name="Image 0" descr="/home/claude/f4/img/v2/usa_vaccine.jpg">    </p:cNvPr>
           <p:cNvPicPr>
             <a:picLocks noChangeAspect="1"/>
           </p:cNvPicPr>
@@ -15997,8 +16123,8 @@
         </p:blipFill>
         <p:spPr>
           <a:xfrm>
-            <a:off x="5349240" y="2461422"/>
-            <a:ext cx="6659575" cy="2913564"/>
+            <a:off x="6537960" y="2400897"/>
+            <a:ext cx="5470855" cy="3034615"/>
           </a:xfrm>
           <a:prstGeom prst="rect">
             <a:avLst/>
@@ -16013,8 +16139,8 @@
         </p:nvSpPr>
         <p:spPr>
           <a:xfrm>
-            <a:off x="5349240" y="6089904"/>
-            <a:ext cx="6659575" cy="347472"/>
+            <a:off x="6537960" y="6089904"/>
+            <a:ext cx="5470855" cy="347472"/>
           </a:xfrm>
           <a:prstGeom prst="rect">
             <a:avLst/>
@@ -16038,7 +16164,7 @@
                 <a:ea typeface="Times New Roman" pitchFamily="34" charset="-122"/>
                 <a:cs typeface="Times New Roman" pitchFamily="34" charset="-120"/>
               </a:rPr>
-              <a:t>Illustration: the billions of people</a:t>
+              <a:t>Illustration: vaccination</a:t>
             </a:r>
             <a:endParaRPr lang="en-US" sz="1600" dirty="0"/>
           </a:p>
@@ -16395,150 +16521,9 @@
           </a:p>
         </p:txBody>
       </p:sp>
-      <p:sp>
-        <p:nvSpPr>
-          <p:cNvPr id="3" name="Text 1"/>
-          <p:cNvSpPr/>
-          <p:nvPr/>
-        </p:nvSpPr>
-        <p:spPr>
-          <a:xfrm>
-            <a:off x="365760" y="1005840"/>
-            <a:ext cx="11460175" cy="731520"/>
-          </a:xfrm>
-          <a:prstGeom prst="rect">
-            <a:avLst/>
-          </a:prstGeom>
-          <a:noFill/>
-          <a:ln/>
-        </p:spPr>
-        <p:txBody>
-          <a:bodyPr wrap="square" lIns="0" tIns="0" rIns="0" bIns="0" rtlCol="0" anchor="ctr">
-            <a:normAutofit/>
-          </a:bodyPr>
-          <a:lstStyle/>
-          <a:p>
-            <a:pPr algn="ctr" indent="0" marL="0">
-              <a:buNone/>
-            </a:pPr>
-            <a:r>
-              <a:rPr lang="en-US" sz="3600" b="1" dirty="0">
-                <a:solidFill>
-                  <a:srgbClr val="990011"/>
-                </a:solidFill>
-                <a:latin typeface="Times New Roman" pitchFamily="34" charset="0"/>
-                <a:ea typeface="Times New Roman" pitchFamily="34" charset="-122"/>
-                <a:cs typeface="Times New Roman" pitchFamily="34" charset="-120"/>
-              </a:rPr>
-              <a:t>1. The Modern Demographic Explosion</a:t>
-            </a:r>
-            <a:endParaRPr lang="en-US" sz="3600" dirty="0"/>
-          </a:p>
-        </p:txBody>
-      </p:sp>
-      <p:sp>
-        <p:nvSpPr>
-          <p:cNvPr id="4" name="Text 2"/>
-          <p:cNvSpPr/>
-          <p:nvPr/>
-        </p:nvSpPr>
-        <p:spPr>
-          <a:xfrm>
-            <a:off x="365760" y="1737360"/>
-            <a:ext cx="5120640" cy="457200"/>
-          </a:xfrm>
-          <a:prstGeom prst="rect">
-            <a:avLst/>
-          </a:prstGeom>
-          <a:noFill/>
-          <a:ln/>
-        </p:spPr>
-        <p:txBody>
-          <a:bodyPr wrap="square" lIns="0" tIns="0" rIns="0" bIns="0" rtlCol="0" anchor="ctr">
-            <a:normAutofit/>
-          </a:bodyPr>
-          <a:lstStyle/>
-          <a:p>
-            <a:pPr algn="l" indent="0" marL="0">
-              <a:buNone/>
-            </a:pPr>
-            <a:r>
-              <a:rPr lang="en-US" sz="3000" b="1" dirty="0">
-                <a:solidFill>
-                  <a:srgbClr val="990011"/>
-                </a:solidFill>
-                <a:latin typeface="Times New Roman" pitchFamily="34" charset="0"/>
-                <a:ea typeface="Times New Roman" pitchFamily="34" charset="-122"/>
-                <a:cs typeface="Times New Roman" pitchFamily="34" charset="-120"/>
-              </a:rPr>
-              <a:t>A) Causes</a:t>
-            </a:r>
-            <a:endParaRPr lang="en-US" sz="3000" dirty="0"/>
-          </a:p>
-        </p:txBody>
-      </p:sp>
-      <p:sp>
-        <p:nvSpPr>
-          <p:cNvPr id="5" name="Text 3"/>
-          <p:cNvSpPr/>
-          <p:nvPr/>
-        </p:nvSpPr>
-        <p:spPr>
-          <a:xfrm>
-            <a:off x="365760" y="2240280"/>
-            <a:ext cx="4846320" cy="4160520"/>
-          </a:xfrm>
-          <a:prstGeom prst="rect">
-            <a:avLst/>
-          </a:prstGeom>
-          <a:noFill/>
-          <a:ln/>
-        </p:spPr>
-        <p:txBody>
-          <a:bodyPr wrap="square" lIns="0" tIns="0" rIns="0" bIns="0" rtlCol="0" anchor="t"/>
-          <a:lstStyle/>
-          <a:p>
-            <a:pPr algn="l" indent="0" marL="0">
-              <a:spcAft>
-                <a:spcPts val="800"/>
-              </a:spcAft>
-              <a:buNone/>
-            </a:pPr>
-            <a:r>
-              <a:rPr lang="en-US" sz="3600" b="1" dirty="0">
-                <a:solidFill>
-                  <a:srgbClr val="111111"/>
-                </a:solidFill>
-                <a:latin typeface="Times New Roman" pitchFamily="34" charset="0"/>
-                <a:ea typeface="Times New Roman" pitchFamily="34" charset="-122"/>
-                <a:cs typeface="Times New Roman" pitchFamily="34" charset="-120"/>
-              </a:rPr>
-              <a:t>Improved medical care: </a:t>
-            </a:r>
-            <a:pPr algn="l" indent="0" marL="0">
-              <a:spcAft>
-                <a:spcPts val="800"/>
-              </a:spcAft>
-              <a:buNone/>
-            </a:pPr>
-            <a:r>
-              <a:rPr lang="en-US" sz="3600" dirty="0">
-                <a:solidFill>
-                  <a:srgbClr val="111111"/>
-                </a:solidFill>
-                <a:latin typeface="Times New Roman" pitchFamily="34" charset="0"/>
-                <a:ea typeface="Times New Roman" pitchFamily="34" charset="-122"/>
-                <a:cs typeface="Times New Roman" pitchFamily="34" charset="-120"/>
-              </a:rPr>
-              <a:t>Vaccines, antibiotics and better surgery reduced deaths from diseases.</a:t>
-            </a:r>
-            <a:endParaRPr lang="en-US" sz="3600" dirty="0"/>
-          </a:p>
-        </p:txBody>
-      </p:sp>
       <p:pic>
         <p:nvPicPr>
-          <p:cNvPr id="6" name="Image 0" descr="/home/claude/f4/img/v2/usa_vaccine.jpg">    </p:cNvPr>
+          <p:cNvPr id="3" name="Image 0" descr="/home/claude/f4/img/minesec_sheet.png">    </p:cNvPr>
           <p:cNvPicPr>
             <a:picLocks noChangeAspect="1"/>
           </p:cNvPicPr>
@@ -16552,8 +16537,8 @@
         </p:blipFill>
         <p:spPr>
           <a:xfrm>
-            <a:off x="5349240" y="2071212"/>
-            <a:ext cx="6659575" cy="3693983"/>
+            <a:off x="0" y="658368"/>
+            <a:ext cx="5120640" cy="5833872"/>
           </a:xfrm>
           <a:prstGeom prst="rect">
             <a:avLst/>
@@ -16562,14 +16547,14 @@
       </p:pic>
       <p:sp>
         <p:nvSpPr>
-          <p:cNvPr id="7" name="Text 4"/>
+          <p:cNvPr id="4" name="Text 1"/>
           <p:cNvSpPr/>
           <p:nvPr/>
         </p:nvSpPr>
         <p:spPr>
           <a:xfrm>
-            <a:off x="5349240" y="6089904"/>
-            <a:ext cx="6659575" cy="347472"/>
+            <a:off x="5349240" y="1005840"/>
+            <a:ext cx="6522415" cy="731520"/>
           </a:xfrm>
           <a:prstGeom prst="rect">
             <a:avLst/>
@@ -16578,24 +16563,124 @@
           <a:ln/>
         </p:spPr>
         <p:txBody>
-          <a:bodyPr wrap="square" lIns="0" tIns="0" rIns="0" bIns="0" rtlCol="0" anchor="ctr"/>
+          <a:bodyPr wrap="square" lIns="0" tIns="0" rIns="0" bIns="0" rtlCol="0" anchor="ctr">
+            <a:normAutofit/>
+          </a:bodyPr>
           <a:lstStyle/>
           <a:p>
             <a:pPr algn="ctr" indent="0" marL="0">
               <a:buNone/>
             </a:pPr>
             <a:r>
-              <a:rPr lang="en-US" sz="1600" i="1" dirty="0">
-                <a:solidFill>
-                  <a:srgbClr val="555555"/>
+              <a:rPr lang="en-US" sz="3600" b="1" dirty="0">
+                <a:solidFill>
+                  <a:srgbClr val="990011"/>
                 </a:solidFill>
                 <a:latin typeface="Times New Roman" pitchFamily="34" charset="0"/>
                 <a:ea typeface="Times New Roman" pitchFamily="34" charset="-122"/>
                 <a:cs typeface="Times New Roman" pitchFamily="34" charset="-120"/>
               </a:rPr>
-              <a:t>Illustration: vaccination</a:t>
-            </a:r>
-            <a:endParaRPr lang="en-US" sz="1600" dirty="0"/>
+              <a:t>1. The Modern Demographic Explosion</a:t>
+            </a:r>
+            <a:endParaRPr lang="en-US" sz="3600" dirty="0"/>
+          </a:p>
+        </p:txBody>
+      </p:sp>
+      <p:sp>
+        <p:nvSpPr>
+          <p:cNvPr id="5" name="Text 2"/>
+          <p:cNvSpPr/>
+          <p:nvPr/>
+        </p:nvSpPr>
+        <p:spPr>
+          <a:xfrm>
+            <a:off x="5349240" y="1737360"/>
+            <a:ext cx="6522415" cy="457200"/>
+          </a:xfrm>
+          <a:prstGeom prst="rect">
+            <a:avLst/>
+          </a:prstGeom>
+          <a:noFill/>
+          <a:ln/>
+        </p:spPr>
+        <p:txBody>
+          <a:bodyPr wrap="square" lIns="0" tIns="0" rIns="0" bIns="0" rtlCol="0" anchor="ctr"/>
+          <a:lstStyle/>
+          <a:p>
+            <a:pPr algn="l" indent="0" marL="0">
+              <a:buNone/>
+            </a:pPr>
+            <a:r>
+              <a:rPr lang="en-US" sz="3200" b="1" dirty="0">
+                <a:solidFill>
+                  <a:srgbClr val="990011"/>
+                </a:solidFill>
+                <a:latin typeface="Times New Roman" pitchFamily="34" charset="0"/>
+                <a:ea typeface="Times New Roman" pitchFamily="34" charset="-122"/>
+                <a:cs typeface="Times New Roman" pitchFamily="34" charset="-120"/>
+              </a:rPr>
+              <a:t>A) Causes</a:t>
+            </a:r>
+            <a:endParaRPr lang="en-US" sz="3200" dirty="0"/>
+          </a:p>
+        </p:txBody>
+      </p:sp>
+      <p:sp>
+        <p:nvSpPr>
+          <p:cNvPr id="6" name="Text 3"/>
+          <p:cNvSpPr/>
+          <p:nvPr/>
+        </p:nvSpPr>
+        <p:spPr>
+          <a:xfrm>
+            <a:off x="5349240" y="2240280"/>
+            <a:ext cx="6522415" cy="4206240"/>
+          </a:xfrm>
+          <a:prstGeom prst="rect">
+            <a:avLst/>
+          </a:prstGeom>
+          <a:noFill/>
+          <a:ln/>
+        </p:spPr>
+        <p:txBody>
+          <a:bodyPr wrap="square" lIns="0" tIns="0" rIns="0" bIns="0" rtlCol="0" anchor="t"/>
+          <a:lstStyle/>
+          <a:p>
+            <a:pPr algn="l" indent="0" marL="0">
+              <a:spcAft>
+                <a:spcPts val="800"/>
+              </a:spcAft>
+              <a:buNone/>
+            </a:pPr>
+            <a:r>
+              <a:rPr lang="en-US" sz="4000" b="1" dirty="0">
+                <a:solidFill>
+                  <a:srgbClr val="111111"/>
+                </a:solidFill>
+                <a:latin typeface="Times New Roman" pitchFamily="34" charset="0"/>
+                <a:ea typeface="Times New Roman" pitchFamily="34" charset="-122"/>
+                <a:cs typeface="Times New Roman" pitchFamily="34" charset="-120"/>
+              </a:rPr>
+              <a:t>Improved sanitation: </a:t>
+            </a:r>
+            <a:pPr algn="l" indent="0" marL="0">
+              <a:spcAft>
+                <a:spcPts val="800"/>
+              </a:spcAft>
+              <a:buNone/>
+            </a:pPr>
+            <a:r>
+              <a:rPr lang="en-US" sz="4000" dirty="0">
+                <a:solidFill>
+                  <a:srgbClr val="111111"/>
+                </a:solidFill>
+                <a:latin typeface="Times New Roman" pitchFamily="34" charset="0"/>
+                <a:ea typeface="Times New Roman" pitchFamily="34" charset="-122"/>
+                <a:cs typeface="Times New Roman" pitchFamily="34" charset="-120"/>
+              </a:rPr>
+              <a:t>Clean water and sewers reduced diseases such as cholera and typhoid. Fewer children died, so more reached adulthood and had children.</a:t>
+            </a:r>
+            <a:endParaRPr lang="en-US" sz="4000" dirty="0"/>
           </a:p>
         </p:txBody>
       </p:sp>
@@ -16728,7 +16813,7 @@
         <p:spPr>
           <a:xfrm>
             <a:off x="0" y="658368"/>
-            <a:ext cx="2468880" cy="5833872"/>
+            <a:ext cx="3840480" cy="5833872"/>
           </a:xfrm>
           <a:prstGeom prst="rect">
             <a:avLst/>
@@ -16743,8 +16828,8 @@
         </p:nvSpPr>
         <p:spPr>
           <a:xfrm>
-            <a:off x="2697480" y="1005840"/>
-            <a:ext cx="9174175" cy="731520"/>
+            <a:off x="4069080" y="1005840"/>
+            <a:ext cx="7802575" cy="731520"/>
           </a:xfrm>
           <a:prstGeom prst="rect">
             <a:avLst/>
@@ -16784,8 +16869,8 @@
         </p:nvSpPr>
         <p:spPr>
           <a:xfrm>
-            <a:off x="2697480" y="1737360"/>
-            <a:ext cx="9174175" cy="457200"/>
+            <a:off x="4069080" y="1737360"/>
+            <a:ext cx="7802575" cy="457200"/>
           </a:xfrm>
           <a:prstGeom prst="rect">
             <a:avLst/>
@@ -16823,8 +16908,8 @@
         </p:nvSpPr>
         <p:spPr>
           <a:xfrm>
-            <a:off x="2697480" y="2240280"/>
-            <a:ext cx="9174175" cy="4206240"/>
+            <a:off x="4069080" y="2240280"/>
+            <a:ext cx="7802575" cy="4206240"/>
           </a:xfrm>
           <a:prstGeom prst="rect">
             <a:avLst/>
@@ -16851,7 +16936,7 @@
                 <a:ea typeface="Times New Roman" pitchFamily="34" charset="-122"/>
                 <a:cs typeface="Times New Roman" pitchFamily="34" charset="-120"/>
               </a:rPr>
-              <a:t>Improved sanitation: </a:t>
+              <a:t>More food: </a:t>
             </a:r>
             <a:pPr algn="l" indent="0" marL="0">
               <a:spcAft>
@@ -16868,44 +16953,7 @@
                 <a:ea typeface="Times New Roman" pitchFamily="34" charset="-122"/>
                 <a:cs typeface="Times New Roman" pitchFamily="34" charset="-120"/>
               </a:rPr>
-              <a:t>Clean water and sewers reduced cholera and typhoid.</a:t>
-            </a:r>
-            <a:endParaRPr lang="en-US" sz="4000" dirty="0"/>
-          </a:p>
-          <a:p>
-            <a:pPr algn="l" indent="0" marL="0">
-              <a:spcAft>
-                <a:spcPts val="800"/>
-              </a:spcAft>
-              <a:buNone/>
-            </a:pPr>
-            <a:r>
-              <a:rPr lang="en-US" sz="4000" b="1" dirty="0">
-                <a:solidFill>
-                  <a:srgbClr val="111111"/>
-                </a:solidFill>
-                <a:latin typeface="Times New Roman" pitchFamily="34" charset="0"/>
-                <a:ea typeface="Times New Roman" pitchFamily="34" charset="-122"/>
-                <a:cs typeface="Times New Roman" pitchFamily="34" charset="-120"/>
-              </a:rPr>
-              <a:t>More food: </a:t>
-            </a:r>
-            <a:pPr algn="l" indent="0" marL="0">
-              <a:spcAft>
-                <a:spcPts val="800"/>
-              </a:spcAft>
-              <a:buNone/>
-            </a:pPr>
-            <a:r>
-              <a:rPr lang="en-US" sz="4000" dirty="0">
-                <a:solidFill>
-                  <a:srgbClr val="111111"/>
-                </a:solidFill>
-                <a:latin typeface="Times New Roman" pitchFamily="34" charset="0"/>
-                <a:ea typeface="Times New Roman" pitchFamily="34" charset="-122"/>
-                <a:cs typeface="Times New Roman" pitchFamily="34" charset="-120"/>
-              </a:rPr>
-              <a:t>The Green Revolution (new seeds, fertilisers, irrigation) fed a much larger population.</a:t>
+              <a:t>The Green Revolution, with new seeds, fertilisers and irrigation, greatly increased food production. It fed a much larger population and reduced famines.</a:t>
             </a:r>
             <a:endParaRPr lang="en-US" sz="4000" dirty="0"/>
           </a:p>
@@ -17040,7 +17088,7 @@
         <p:spPr>
           <a:xfrm>
             <a:off x="0" y="658368"/>
-            <a:ext cx="5120640" cy="5833872"/>
+            <a:ext cx="3840480" cy="5833872"/>
           </a:xfrm>
           <a:prstGeom prst="rect">
             <a:avLst/>
@@ -17055,8 +17103,8 @@
         </p:nvSpPr>
         <p:spPr>
           <a:xfrm>
-            <a:off x="5349240" y="1005840"/>
-            <a:ext cx="6522415" cy="731520"/>
+            <a:off x="4069080" y="1005840"/>
+            <a:ext cx="7802575" cy="731520"/>
           </a:xfrm>
           <a:prstGeom prst="rect">
             <a:avLst/>
@@ -17096,8 +17144,8 @@
         </p:nvSpPr>
         <p:spPr>
           <a:xfrm>
-            <a:off x="5349240" y="1737360"/>
-            <a:ext cx="6522415" cy="457200"/>
+            <a:off x="4069080" y="1737360"/>
+            <a:ext cx="7802575" cy="457200"/>
           </a:xfrm>
           <a:prstGeom prst="rect">
             <a:avLst/>
@@ -17121,7 +17169,7 @@
                 <a:ea typeface="Times New Roman" pitchFamily="34" charset="-122"/>
                 <a:cs typeface="Times New Roman" pitchFamily="34" charset="-120"/>
               </a:rPr>
-              <a:t>A) Causes (continued)</a:t>
+              <a:t>A) Causes</a:t>
             </a:r>
             <a:endParaRPr lang="en-US" sz="3200" dirty="0"/>
           </a:p>
@@ -17135,8 +17183,8 @@
         </p:nvSpPr>
         <p:spPr>
           <a:xfrm>
-            <a:off x="5349240" y="2240280"/>
-            <a:ext cx="6522415" cy="4206240"/>
+            <a:off x="4069080" y="2240280"/>
+            <a:ext cx="7802575" cy="4206240"/>
           </a:xfrm>
           <a:prstGeom prst="rect">
             <a:avLst/>
@@ -17180,7 +17228,7 @@
                 <a:ea typeface="Times New Roman" pitchFamily="34" charset="-122"/>
                 <a:cs typeface="Times New Roman" pitchFamily="34" charset="-120"/>
               </a:rPr>
-              <a:t>In developing countries, births remain high because of traditions, limited family planning and the value of children.</a:t>
+              <a:t>In developing countries, births remain high because of traditions, limited family planning and the value of children. The gap between births and deaths creates the explosion.</a:t>
             </a:r>
             <a:endParaRPr lang="en-US" sz="4000" dirty="0"/>
           </a:p>
@@ -17438,7 +17486,7 @@
                 <a:ea typeface="Times New Roman" pitchFamily="34" charset="-122"/>
                 <a:cs typeface="Times New Roman" pitchFamily="34" charset="-120"/>
               </a:rPr>
-              <a:t>The consequences of the demographic explosion are the following:</a:t>
+              <a:t>The demographic explosion has the following consequences:</a:t>
             </a:r>
             <a:endParaRPr lang="en-US" sz="4000" dirty="0"/>
           </a:p>
@@ -17458,17 +17506,13 @@
                 <a:ea typeface="Times New Roman" pitchFamily="34" charset="-122"/>
                 <a:cs typeface="Times New Roman" pitchFamily="34" charset="-120"/>
               </a:rPr>
-              <a:t>Positive consequences:</a:t>
-            </a:r>
-            <a:endParaRPr lang="en-US" sz="4000" dirty="0"/>
-          </a:p>
-          <a:p>
-            <a:pPr algn="l" marL="342900" indent="-342900">
+              <a:t>A large labour force and market: </a:t>
+            </a:r>
+            <a:pPr algn="l" indent="0" marL="0">
               <a:spcAft>
                 <a:spcPts val="800"/>
               </a:spcAft>
-              <a:buSzPct val="100000"/>
-              <a:buChar char="•"/>
+              <a:buNone/>
             </a:pPr>
             <a:r>
               <a:rPr lang="en-US" sz="4000" dirty="0">
@@ -17479,28 +17523,7 @@
                 <a:ea typeface="Times New Roman" pitchFamily="34" charset="-122"/>
                 <a:cs typeface="Times New Roman" pitchFamily="34" charset="-120"/>
               </a:rPr>
-              <a:t>A large labour force for industries and services.</a:t>
-            </a:r>
-            <a:endParaRPr lang="en-US" sz="4000" dirty="0"/>
-          </a:p>
-          <a:p>
-            <a:pPr algn="l" marL="342900" indent="-342900">
-              <a:spcAft>
-                <a:spcPts val="800"/>
-              </a:spcAft>
-              <a:buSzPct val="100000"/>
-              <a:buChar char="•"/>
-            </a:pPr>
-            <a:r>
-              <a:rPr lang="en-US" sz="4000" dirty="0">
-                <a:solidFill>
-                  <a:srgbClr val="111111"/>
-                </a:solidFill>
-                <a:latin typeface="Times New Roman" pitchFamily="34" charset="0"/>
-                <a:ea typeface="Times New Roman" pitchFamily="34" charset="-122"/>
-                <a:cs typeface="Times New Roman" pitchFamily="34" charset="-120"/>
-              </a:rPr>
-              <a:t>Bigger markets that stimulate the economy.</a:t>
+              <a:t>A growing population provides many workers for industries and services. It also creates bigger markets that stimulate the economy.</a:t>
             </a:r>
             <a:endParaRPr lang="en-US" sz="4000" dirty="0"/>
           </a:p>
@@ -17668,7 +17691,7 @@
         <p:spPr>
           <a:xfrm>
             <a:off x="365760" y="1737360"/>
-            <a:ext cx="5120640" cy="457200"/>
+            <a:ext cx="6035040" cy="457200"/>
           </a:xfrm>
           <a:prstGeom prst="rect">
             <a:avLst/>
@@ -17709,7 +17732,7 @@
         <p:spPr>
           <a:xfrm>
             <a:off x="365760" y="2240280"/>
-            <a:ext cx="4846320" cy="4160520"/>
+            <a:ext cx="6035040" cy="4160520"/>
           </a:xfrm>
           <a:prstGeom prst="rect">
             <a:avLst/>
@@ -17753,7 +17776,7 @@
                 <a:ea typeface="Times New Roman" pitchFamily="34" charset="-122"/>
                 <a:cs typeface="Times New Roman" pitchFamily="34" charset="-120"/>
               </a:rPr>
-              <a:t>Water, food, housing and energy run short, as firewood around Garoua.</a:t>
+              <a:t>Water, food, housing and energy run short. Around Garoua, for example, the demand for firewood is destroying the savanna.</a:t>
             </a:r>
             <a:endParaRPr lang="en-US" sz="3600" dirty="0"/>
           </a:p>
@@ -17775,8 +17798,8 @@
         </p:blipFill>
         <p:spPr>
           <a:xfrm>
-            <a:off x="5349240" y="2071212"/>
-            <a:ext cx="6659575" cy="3693983"/>
+            <a:off x="6537960" y="2400897"/>
+            <a:ext cx="5470855" cy="3034615"/>
           </a:xfrm>
           <a:prstGeom prst="rect">
             <a:avLst/>
@@ -17791,8 +17814,8 @@
         </p:nvSpPr>
         <p:spPr>
           <a:xfrm>
-            <a:off x="5349240" y="6089904"/>
-            <a:ext cx="6659575" cy="347472"/>
+            <a:off x="6537960" y="6089904"/>
+            <a:ext cx="5470855" cy="347472"/>
           </a:xfrm>
           <a:prstGeom prst="rect">
             <a:avLst/>
@@ -17816,7 +17839,7 @@
                 <a:ea typeface="Times New Roman" pitchFamily="34" charset="-122"/>
                 <a:cs typeface="Times New Roman" pitchFamily="34" charset="-120"/>
               </a:rPr>
-              <a:t>Illustration: firewood and charcoal</a:t>
+              <a:t>Illustration: charcoal</a:t>
             </a:r>
             <a:endParaRPr lang="en-US" sz="1600" dirty="0"/>
           </a:p>
@@ -17951,7 +17974,7 @@
         <p:spPr>
           <a:xfrm>
             <a:off x="0" y="658368"/>
-            <a:ext cx="3840480" cy="5833872"/>
+            <a:ext cx="5120640" cy="5833872"/>
           </a:xfrm>
           <a:prstGeom prst="rect">
             <a:avLst/>
@@ -17966,8 +17989,8 @@
         </p:nvSpPr>
         <p:spPr>
           <a:xfrm>
-            <a:off x="4069080" y="1005840"/>
-            <a:ext cx="7802575" cy="731520"/>
+            <a:off x="5349240" y="1005840"/>
+            <a:ext cx="6522415" cy="731520"/>
           </a:xfrm>
           <a:prstGeom prst="rect">
             <a:avLst/>
@@ -18007,8 +18030,8 @@
         </p:nvSpPr>
         <p:spPr>
           <a:xfrm>
-            <a:off x="4069080" y="1737360"/>
-            <a:ext cx="7802575" cy="457200"/>
+            <a:off x="5349240" y="1737360"/>
+            <a:ext cx="6522415" cy="457200"/>
           </a:xfrm>
           <a:prstGeom prst="rect">
             <a:avLst/>
@@ -18046,8 +18069,8 @@
         </p:nvSpPr>
         <p:spPr>
           <a:xfrm>
-            <a:off x="4069080" y="2240280"/>
-            <a:ext cx="7802575" cy="4206240"/>
+            <a:off x="5349240" y="2240280"/>
+            <a:ext cx="6522415" cy="4206240"/>
           </a:xfrm>
           <a:prstGeom prst="rect">
             <a:avLst/>
@@ -18091,44 +18114,7 @@
                 <a:ea typeface="Times New Roman" pitchFamily="34" charset="-122"/>
                 <a:cs typeface="Times New Roman" pitchFamily="34" charset="-120"/>
               </a:rPr>
-              <a:t>Deforestation, pollution and loss of biodiversity increase.</a:t>
-            </a:r>
-            <a:endParaRPr lang="en-US" sz="4000" dirty="0"/>
-          </a:p>
-          <a:p>
-            <a:pPr algn="l" indent="0" marL="0">
-              <a:spcAft>
-                <a:spcPts val="800"/>
-              </a:spcAft>
-              <a:buNone/>
-            </a:pPr>
-            <a:r>
-              <a:rPr lang="en-US" sz="4000" b="1" dirty="0">
-                <a:solidFill>
-                  <a:srgbClr val="111111"/>
-                </a:solidFill>
-                <a:latin typeface="Times New Roman" pitchFamily="34" charset="0"/>
-                <a:ea typeface="Times New Roman" pitchFamily="34" charset="-122"/>
-                <a:cs typeface="Times New Roman" pitchFamily="34" charset="-120"/>
-              </a:rPr>
-              <a:t>Unemployment: </a:t>
-            </a:r>
-            <a:pPr algn="l" indent="0" marL="0">
-              <a:spcAft>
-                <a:spcPts val="800"/>
-              </a:spcAft>
-              <a:buNone/>
-            </a:pPr>
-            <a:r>
-              <a:rPr lang="en-US" sz="4000" dirty="0">
-                <a:solidFill>
-                  <a:srgbClr val="111111"/>
-                </a:solidFill>
-                <a:latin typeface="Times New Roman" pitchFamily="34" charset="0"/>
-                <a:ea typeface="Times New Roman" pitchFamily="34" charset="-122"/>
-                <a:cs typeface="Times New Roman" pitchFamily="34" charset="-120"/>
-              </a:rPr>
-              <a:t>The economy does not create jobs fast enough for all the young people.</a:t>
+              <a:t>Forests are cleared for farms and towns, and pollution increases. Many plants and animals lose their habitats.</a:t>
             </a:r>
             <a:endParaRPr lang="en-US" sz="4000" dirty="0"/>
           </a:p>
@@ -18296,7 +18282,7 @@
         <p:spPr>
           <a:xfrm>
             <a:off x="365760" y="1737360"/>
-            <a:ext cx="5120640" cy="457200"/>
+            <a:ext cx="6035040" cy="457200"/>
           </a:xfrm>
           <a:prstGeom prst="rect">
             <a:avLst/>
@@ -18337,7 +18323,7 @@
         <p:spPr>
           <a:xfrm>
             <a:off x="365760" y="2240280"/>
-            <a:ext cx="4846320" cy="4160520"/>
+            <a:ext cx="6035040" cy="4160520"/>
           </a:xfrm>
           <a:prstGeom prst="rect">
             <a:avLst/>
@@ -18364,7 +18350,7 @@
                 <a:ea typeface="Times New Roman" pitchFamily="34" charset="-122"/>
                 <a:cs typeface="Times New Roman" pitchFamily="34" charset="-120"/>
               </a:rPr>
-              <a:t>Overcrowding: </a:t>
+              <a:t>Unemployment and overcrowding: </a:t>
             </a:r>
             <a:pPr algn="l" indent="0" marL="0">
               <a:spcAft>
@@ -18381,7 +18367,7 @@
                 <a:ea typeface="Times New Roman" pitchFamily="34" charset="-122"/>
                 <a:cs typeface="Times New Roman" pitchFamily="34" charset="-120"/>
               </a:rPr>
-              <a:t>Schools, hospitals and public transport are overloaded.</a:t>
+              <a:t>The economy does not create jobs fast enough for all the young people. Schools, hospitals and public transport are overloaded.</a:t>
             </a:r>
             <a:endParaRPr lang="en-US" sz="3600" dirty="0"/>
           </a:p>
@@ -18403,8 +18389,8 @@
         </p:blipFill>
         <p:spPr>
           <a:xfrm>
-            <a:off x="5349240" y="2617506"/>
-            <a:ext cx="6659575" cy="2601397"/>
+            <a:off x="6537960" y="2849678"/>
+            <a:ext cx="5470855" cy="2137053"/>
           </a:xfrm>
           <a:prstGeom prst="rect">
             <a:avLst/>
@@ -18419,8 +18405,8 @@
         </p:nvSpPr>
         <p:spPr>
           <a:xfrm>
-            <a:off x="5349240" y="6089904"/>
-            <a:ext cx="6659575" cy="347472"/>
+            <a:off x="6537960" y="6089904"/>
+            <a:ext cx="5470855" cy="347472"/>
           </a:xfrm>
           <a:prstGeom prst="rect">
             <a:avLst/>
@@ -18444,7 +18430,7 @@
                 <a:ea typeface="Times New Roman" pitchFamily="34" charset="-122"/>
                 <a:cs typeface="Times New Roman" pitchFamily="34" charset="-120"/>
               </a:rPr>
-              <a:t>Illustration: consequences of rapid growth</a:t>
+              <a:t>Illustration: the consequences of the explosion</a:t>
             </a:r>
             <a:endParaRPr lang="en-US" sz="1600" dirty="0"/>
           </a:p>
@@ -18612,7 +18598,7 @@
         <p:spPr>
           <a:xfrm>
             <a:off x="365760" y="1737360"/>
-            <a:ext cx="5120640" cy="457200"/>
+            <a:ext cx="6035040" cy="457200"/>
           </a:xfrm>
           <a:prstGeom prst="rect">
             <a:avLst/>
@@ -18638,7 +18624,7 @@
                 <a:ea typeface="Times New Roman" pitchFamily="34" charset="-122"/>
                 <a:cs typeface="Times New Roman" pitchFamily="34" charset="-120"/>
               </a:rPr>
-              <a:t>A) Pro-Natalist Policies</a:t>
+              <a:t>A) Pro-Natal Policies</a:t>
             </a:r>
             <a:endParaRPr lang="en-US" sz="3000" dirty="0"/>
           </a:p>
@@ -18653,7 +18639,7 @@
         <p:spPr>
           <a:xfrm>
             <a:off x="365760" y="2240280"/>
-            <a:ext cx="4846320" cy="4160520"/>
+            <a:ext cx="6035040" cy="4160520"/>
           </a:xfrm>
           <a:prstGeom prst="rect">
             <a:avLst/>
@@ -18672,7 +18658,7 @@
               <a:buNone/>
             </a:pPr>
             <a:r>
-              <a:rPr lang="en-US" sz="3600" i="1" dirty="0">
+              <a:rPr lang="en-US" sz="3200" i="1" dirty="0">
                 <a:solidFill>
                   <a:srgbClr val="111111"/>
                 </a:solidFill>
@@ -18680,9 +18666,9 @@
                 <a:ea typeface="Times New Roman" pitchFamily="34" charset="-122"/>
                 <a:cs typeface="Times New Roman" pitchFamily="34" charset="-120"/>
               </a:rPr>
-              <a:t>Pro-natalist policies are presented as follows:</a:t>
-            </a:r>
-            <a:endParaRPr lang="en-US" sz="3600" dirty="0"/>
+              <a:t>Pro-natal policies are applied as follows:</a:t>
+            </a:r>
+            <a:endParaRPr lang="en-US" sz="3200" dirty="0"/>
           </a:p>
           <a:p>
             <a:pPr algn="l" indent="0" marL="0">
@@ -18692,7 +18678,7 @@
               <a:buNone/>
             </a:pPr>
             <a:r>
-              <a:rPr lang="en-US" sz="3600" b="1" dirty="0">
+              <a:rPr lang="en-US" sz="3200" b="1" dirty="0">
                 <a:solidFill>
                   <a:srgbClr val="111111"/>
                 </a:solidFill>
@@ -18709,7 +18695,7 @@
               <a:buNone/>
             </a:pPr>
             <a:r>
-              <a:rPr lang="en-US" sz="3600" dirty="0">
+              <a:rPr lang="en-US" sz="3200" dirty="0">
                 <a:solidFill>
                   <a:srgbClr val="111111"/>
                 </a:solidFill>
@@ -18717,9 +18703,9 @@
                 <a:ea typeface="Times New Roman" pitchFamily="34" charset="-122"/>
                 <a:cs typeface="Times New Roman" pitchFamily="34" charset="-120"/>
               </a:rPr>
-              <a:t>They encourage births in countries with low fertility and ageing populations.</a:t>
-            </a:r>
-            <a:endParaRPr lang="en-US" sz="3600" dirty="0"/>
+              <a:t>They encourage births in countries with low fertility and ageing populations. They try to avoid a decline of the population and a shortage of workers.</a:t>
+            </a:r>
+            <a:endParaRPr lang="en-US" sz="3200" dirty="0"/>
           </a:p>
         </p:txBody>
       </p:sp>
@@ -18739,8 +18725,8 @@
         </p:blipFill>
         <p:spPr>
           <a:xfrm>
-            <a:off x="5349240" y="2617506"/>
-            <a:ext cx="6659575" cy="2601397"/>
+            <a:off x="6537960" y="2849678"/>
+            <a:ext cx="5470855" cy="2137053"/>
           </a:xfrm>
           <a:prstGeom prst="rect">
             <a:avLst/>
@@ -18755,8 +18741,8 @@
         </p:nvSpPr>
         <p:spPr>
           <a:xfrm>
-            <a:off x="5349240" y="6089904"/>
-            <a:ext cx="6659575" cy="347472"/>
+            <a:off x="6537960" y="6089904"/>
+            <a:ext cx="5470855" cy="347472"/>
           </a:xfrm>
           <a:prstGeom prst="rect">
             <a:avLst/>
@@ -18915,7 +18901,7 @@
         <p:spPr>
           <a:xfrm>
             <a:off x="0" y="658368"/>
-            <a:ext cx="5120640" cy="5833872"/>
+            <a:ext cx="3840480" cy="5833872"/>
           </a:xfrm>
           <a:prstGeom prst="rect">
             <a:avLst/>
@@ -18930,8 +18916,8 @@
         </p:nvSpPr>
         <p:spPr>
           <a:xfrm>
-            <a:off x="5349240" y="1005840"/>
-            <a:ext cx="6522415" cy="731520"/>
+            <a:off x="4069080" y="1005840"/>
+            <a:ext cx="7802575" cy="731520"/>
           </a:xfrm>
           <a:prstGeom prst="rect">
             <a:avLst/>
@@ -18971,8 +18957,8 @@
         </p:nvSpPr>
         <p:spPr>
           <a:xfrm>
-            <a:off x="5349240" y="1737360"/>
-            <a:ext cx="6522415" cy="457200"/>
+            <a:off x="4069080" y="1737360"/>
+            <a:ext cx="7802575" cy="457200"/>
           </a:xfrm>
           <a:prstGeom prst="rect">
             <a:avLst/>
@@ -18996,7 +18982,7 @@
                 <a:ea typeface="Times New Roman" pitchFamily="34" charset="-122"/>
                 <a:cs typeface="Times New Roman" pitchFamily="34" charset="-120"/>
               </a:rPr>
-              <a:t>A) Pro-Natalist Policies</a:t>
+              <a:t>A) Pro-Natal Policies</a:t>
             </a:r>
             <a:endParaRPr lang="en-US" sz="3200" dirty="0"/>
           </a:p>
@@ -19010,8 +18996,8 @@
         </p:nvSpPr>
         <p:spPr>
           <a:xfrm>
-            <a:off x="5349240" y="2240280"/>
-            <a:ext cx="6522415" cy="4206240"/>
+            <a:off x="4069080" y="2240280"/>
+            <a:ext cx="7802575" cy="4206240"/>
           </a:xfrm>
           <a:prstGeom prst="rect">
             <a:avLst/>
@@ -19055,7 +19041,7 @@
                 <a:ea typeface="Times New Roman" pitchFamily="34" charset="-122"/>
                 <a:cs typeface="Times New Roman" pitchFamily="34" charset="-120"/>
               </a:rPr>
-              <a:t>It offers paid parental leave, cheap childcare and family allowances, which are larger from the third child.</a:t>
+              <a:t>France offers paid parental leave, cheap childcare and family allowances, which are larger from the third child. It has one of the highest fertility rates in Europe.</a:t>
             </a:r>
             <a:endParaRPr lang="en-US" sz="4000" dirty="0"/>
           </a:p>
@@ -19190,7 +19176,7 @@
         <p:spPr>
           <a:xfrm>
             <a:off x="0" y="658368"/>
-            <a:ext cx="5120640" cy="5833872"/>
+            <a:ext cx="3840480" cy="5833872"/>
           </a:xfrm>
           <a:prstGeom prst="rect">
             <a:avLst/>
@@ -19205,8 +19191,8 @@
         </p:nvSpPr>
         <p:spPr>
           <a:xfrm>
-            <a:off x="5349240" y="1005840"/>
-            <a:ext cx="6522415" cy="731520"/>
+            <a:off x="4069080" y="1005840"/>
+            <a:ext cx="7802575" cy="731520"/>
           </a:xfrm>
           <a:prstGeom prst="rect">
             <a:avLst/>
@@ -19246,8 +19232,8 @@
         </p:nvSpPr>
         <p:spPr>
           <a:xfrm>
-            <a:off x="5349240" y="1737360"/>
-            <a:ext cx="6522415" cy="457200"/>
+            <a:off x="4069080" y="1737360"/>
+            <a:ext cx="7802575" cy="457200"/>
           </a:xfrm>
           <a:prstGeom prst="rect">
             <a:avLst/>
@@ -19263,7 +19249,7 @@
               <a:buNone/>
             </a:pPr>
             <a:r>
-              <a:rPr lang="en-US" sz="2800" b="1" dirty="0">
+              <a:rPr lang="en-US" sz="3200" b="1" dirty="0">
                 <a:solidFill>
                   <a:srgbClr val="990011"/>
                 </a:solidFill>
@@ -19271,9 +19257,9 @@
                 <a:ea typeface="Times New Roman" pitchFamily="34" charset="-122"/>
                 <a:cs typeface="Times New Roman" pitchFamily="34" charset="-120"/>
               </a:rPr>
-              <a:t>A) Pro-Natalist Policies (continued)</a:t>
-            </a:r>
-            <a:endParaRPr lang="en-US" sz="2800" dirty="0"/>
+              <a:t>A) Pro-Natal Policies</a:t>
+            </a:r>
+            <a:endParaRPr lang="en-US" sz="3200" dirty="0"/>
           </a:p>
         </p:txBody>
       </p:sp>
@@ -19285,8 +19271,8 @@
         </p:nvSpPr>
         <p:spPr>
           <a:xfrm>
-            <a:off x="5349240" y="2240280"/>
-            <a:ext cx="6522415" cy="4206240"/>
+            <a:off x="4069080" y="2240280"/>
+            <a:ext cx="7802575" cy="4206240"/>
           </a:xfrm>
           <a:prstGeom prst="rect">
             <a:avLst/>
@@ -19330,7 +19316,7 @@
                 <a:ea typeface="Times New Roman" pitchFamily="34" charset="-122"/>
                 <a:cs typeface="Times New Roman" pitchFamily="34" charset="-120"/>
               </a:rPr>
-              <a:t>Russia, Singapore and South Korea give money and other advantages to parents.</a:t>
+              <a:t>Russia, Singapore and South Korea give money, housing and other advantages to parents. Results are often limited, because the cost of raising children remains high.</a:t>
             </a:r>
             <a:endParaRPr lang="en-US" sz="4000" dirty="0"/>
           </a:p>
@@ -19667,9 +19653,170 @@
           </a:p>
         </p:txBody>
       </p:sp>
+      <p:sp>
+        <p:nvSpPr>
+          <p:cNvPr id="3" name="Text 1"/>
+          <p:cNvSpPr/>
+          <p:nvPr/>
+        </p:nvSpPr>
+        <p:spPr>
+          <a:xfrm>
+            <a:off x="365760" y="1005840"/>
+            <a:ext cx="11460175" cy="731520"/>
+          </a:xfrm>
+          <a:prstGeom prst="rect">
+            <a:avLst/>
+          </a:prstGeom>
+          <a:noFill/>
+          <a:ln/>
+        </p:spPr>
+        <p:txBody>
+          <a:bodyPr wrap="square" lIns="0" tIns="0" rIns="0" bIns="0" rtlCol="0" anchor="ctr">
+            <a:normAutofit/>
+          </a:bodyPr>
+          <a:lstStyle/>
+          <a:p>
+            <a:pPr algn="ctr" indent="0" marL="0">
+              <a:buNone/>
+            </a:pPr>
+            <a:r>
+              <a:rPr lang="en-US" sz="3600" b="1" dirty="0">
+                <a:solidFill>
+                  <a:srgbClr val="990011"/>
+                </a:solidFill>
+                <a:latin typeface="Times New Roman" pitchFamily="34" charset="0"/>
+                <a:ea typeface="Times New Roman" pitchFamily="34" charset="-122"/>
+                <a:cs typeface="Times New Roman" pitchFamily="34" charset="-120"/>
+              </a:rPr>
+              <a:t>2. Managing Population Growth</a:t>
+            </a:r>
+            <a:endParaRPr lang="en-US" sz="3600" dirty="0"/>
+          </a:p>
+        </p:txBody>
+      </p:sp>
+      <p:sp>
+        <p:nvSpPr>
+          <p:cNvPr id="4" name="Text 2"/>
+          <p:cNvSpPr/>
+          <p:nvPr/>
+        </p:nvSpPr>
+        <p:spPr>
+          <a:xfrm>
+            <a:off x="365760" y="1737360"/>
+            <a:ext cx="6035040" cy="457200"/>
+          </a:xfrm>
+          <a:prstGeom prst="rect">
+            <a:avLst/>
+          </a:prstGeom>
+          <a:noFill/>
+          <a:ln/>
+        </p:spPr>
+        <p:txBody>
+          <a:bodyPr wrap="square" lIns="0" tIns="0" rIns="0" bIns="0" rtlCol="0" anchor="ctr">
+            <a:normAutofit/>
+          </a:bodyPr>
+          <a:lstStyle/>
+          <a:p>
+            <a:pPr algn="l" indent="0" marL="0">
+              <a:buNone/>
+            </a:pPr>
+            <a:r>
+              <a:rPr lang="en-US" sz="3000" b="1" dirty="0">
+                <a:solidFill>
+                  <a:srgbClr val="990011"/>
+                </a:solidFill>
+                <a:latin typeface="Times New Roman" pitchFamily="34" charset="0"/>
+                <a:ea typeface="Times New Roman" pitchFamily="34" charset="-122"/>
+                <a:cs typeface="Times New Roman" pitchFamily="34" charset="-120"/>
+              </a:rPr>
+              <a:t>B) Anti-Natal Policies: the Chinese Experience</a:t>
+            </a:r>
+            <a:endParaRPr lang="en-US" sz="3000" dirty="0"/>
+          </a:p>
+        </p:txBody>
+      </p:sp>
+      <p:sp>
+        <p:nvSpPr>
+          <p:cNvPr id="5" name="Text 3"/>
+          <p:cNvSpPr/>
+          <p:nvPr/>
+        </p:nvSpPr>
+        <p:spPr>
+          <a:xfrm>
+            <a:off x="365760" y="2240280"/>
+            <a:ext cx="6035040" cy="4160520"/>
+          </a:xfrm>
+          <a:prstGeom prst="rect">
+            <a:avLst/>
+          </a:prstGeom>
+          <a:noFill/>
+          <a:ln/>
+        </p:spPr>
+        <p:txBody>
+          <a:bodyPr wrap="square" lIns="0" tIns="0" rIns="0" bIns="0" rtlCol="0" anchor="t"/>
+          <a:lstStyle/>
+          <a:p>
+            <a:pPr algn="l" indent="0" marL="0">
+              <a:spcAft>
+                <a:spcPts val="800"/>
+              </a:spcAft>
+              <a:buNone/>
+            </a:pPr>
+            <a:r>
+              <a:rPr lang="en-US" sz="3200" i="1" dirty="0">
+                <a:solidFill>
+                  <a:srgbClr val="111111"/>
+                </a:solidFill>
+                <a:latin typeface="Times New Roman" pitchFamily="34" charset="0"/>
+                <a:ea typeface="Times New Roman" pitchFamily="34" charset="-122"/>
+                <a:cs typeface="Times New Roman" pitchFamily="34" charset="-120"/>
+              </a:rPr>
+              <a:t>The Chinese anti-natal policy was applied as follows:</a:t>
+            </a:r>
+            <a:endParaRPr lang="en-US" sz="3200" dirty="0"/>
+          </a:p>
+          <a:p>
+            <a:pPr algn="l" indent="0" marL="0">
+              <a:spcAft>
+                <a:spcPts val="800"/>
+              </a:spcAft>
+              <a:buNone/>
+            </a:pPr>
+            <a:r>
+              <a:rPr lang="en-US" sz="3200" b="1" dirty="0">
+                <a:solidFill>
+                  <a:srgbClr val="111111"/>
+                </a:solidFill>
+                <a:latin typeface="Times New Roman" pitchFamily="34" charset="0"/>
+                <a:ea typeface="Times New Roman" pitchFamily="34" charset="-122"/>
+                <a:cs typeface="Times New Roman" pitchFamily="34" charset="-120"/>
+              </a:rPr>
+              <a:t>The one-child policy: </a:t>
+            </a:r>
+            <a:pPr algn="l" indent="0" marL="0">
+              <a:spcAft>
+                <a:spcPts val="800"/>
+              </a:spcAft>
+              <a:buNone/>
+            </a:pPr>
+            <a:r>
+              <a:rPr lang="en-US" sz="3200" dirty="0">
+                <a:solidFill>
+                  <a:srgbClr val="111111"/>
+                </a:solidFill>
+                <a:latin typeface="Times New Roman" pitchFamily="34" charset="0"/>
+                <a:ea typeface="Times New Roman" pitchFamily="34" charset="-122"/>
+                <a:cs typeface="Times New Roman" pitchFamily="34" charset="-120"/>
+              </a:rPr>
+              <a:t>From about 1980 to 2015, most Chinese couples were allowed only one child. Its aim was to slow down growth so that the economy could develop.</a:t>
+            </a:r>
+            <a:endParaRPr lang="en-US" sz="3200" dirty="0"/>
+          </a:p>
+        </p:txBody>
+      </p:sp>
       <p:pic>
         <p:nvPicPr>
-          <p:cNvPr id="3" name="Image 0" descr="/home/claude/f4/img/minesec_sheet.png">    </p:cNvPr>
+          <p:cNvPr id="6" name="Image 0" descr="/home/claude/f4/img/v2/usa_onechild.jpg">    </p:cNvPr>
           <p:cNvPicPr>
             <a:picLocks noChangeAspect="1"/>
           </p:cNvPicPr>
@@ -19683,8 +19830,8 @@
         </p:blipFill>
         <p:spPr>
           <a:xfrm>
-            <a:off x="0" y="658368"/>
-            <a:ext cx="3840480" cy="5833872"/>
+            <a:off x="6537960" y="2400897"/>
+            <a:ext cx="5470855" cy="3034615"/>
           </a:xfrm>
           <a:prstGeom prst="rect">
             <a:avLst/>
@@ -19693,14 +19840,14 @@
       </p:pic>
       <p:sp>
         <p:nvSpPr>
-          <p:cNvPr id="4" name="Text 1"/>
+          <p:cNvPr id="7" name="Text 4"/>
           <p:cNvSpPr/>
           <p:nvPr/>
         </p:nvSpPr>
         <p:spPr>
           <a:xfrm>
-            <a:off x="4069080" y="1005840"/>
-            <a:ext cx="7802575" cy="731520"/>
+            <a:off x="6537960" y="6089904"/>
+            <a:ext cx="5470855" cy="347472"/>
           </a:xfrm>
           <a:prstGeom prst="rect">
             <a:avLst/>
@@ -19709,144 +19856,24 @@
           <a:ln/>
         </p:spPr>
         <p:txBody>
-          <a:bodyPr wrap="square" lIns="0" tIns="0" rIns="0" bIns="0" rtlCol="0" anchor="ctr">
-            <a:normAutofit/>
-          </a:bodyPr>
+          <a:bodyPr wrap="square" lIns="0" tIns="0" rIns="0" bIns="0" rtlCol="0" anchor="ctr"/>
           <a:lstStyle/>
           <a:p>
             <a:pPr algn="ctr" indent="0" marL="0">
               <a:buNone/>
             </a:pPr>
             <a:r>
-              <a:rPr lang="en-US" sz="3600" b="1" dirty="0">
-                <a:solidFill>
-                  <a:srgbClr val="990011"/>
+              <a:rPr lang="en-US" sz="1600" i="1" dirty="0">
+                <a:solidFill>
+                  <a:srgbClr val="555555"/>
                 </a:solidFill>
                 <a:latin typeface="Times New Roman" pitchFamily="34" charset="0"/>
                 <a:ea typeface="Times New Roman" pitchFamily="34" charset="-122"/>
                 <a:cs typeface="Times New Roman" pitchFamily="34" charset="-120"/>
               </a:rPr>
-              <a:t>2. Managing Population Growth</a:t>
-            </a:r>
-            <a:endParaRPr lang="en-US" sz="3600" dirty="0"/>
-          </a:p>
-        </p:txBody>
-      </p:sp>
-      <p:sp>
-        <p:nvSpPr>
-          <p:cNvPr id="5" name="Text 2"/>
-          <p:cNvSpPr/>
-          <p:nvPr/>
-        </p:nvSpPr>
-        <p:spPr>
-          <a:xfrm>
-            <a:off x="4069080" y="1737360"/>
-            <a:ext cx="7802575" cy="457200"/>
-          </a:xfrm>
-          <a:prstGeom prst="rect">
-            <a:avLst/>
-          </a:prstGeom>
-          <a:noFill/>
-          <a:ln/>
-        </p:spPr>
-        <p:txBody>
-          <a:bodyPr wrap="square" lIns="0" tIns="0" rIns="0" bIns="0" rtlCol="0" anchor="ctr"/>
-          <a:lstStyle/>
-          <a:p>
-            <a:pPr algn="l" indent="0" marL="0">
-              <a:buNone/>
-            </a:pPr>
-            <a:r>
-              <a:rPr lang="en-US" sz="2500" b="1" dirty="0">
-                <a:solidFill>
-                  <a:srgbClr val="990011"/>
-                </a:solidFill>
-                <a:latin typeface="Times New Roman" pitchFamily="34" charset="0"/>
-                <a:ea typeface="Times New Roman" pitchFamily="34" charset="-122"/>
-                <a:cs typeface="Times New Roman" pitchFamily="34" charset="-120"/>
-              </a:rPr>
-              <a:t>B) Anti-Natalist Policies: the Chinese Experience</a:t>
-            </a:r>
-            <a:endParaRPr lang="en-US" sz="2500" dirty="0"/>
-          </a:p>
-        </p:txBody>
-      </p:sp>
-      <p:sp>
-        <p:nvSpPr>
-          <p:cNvPr id="6" name="Text 3"/>
-          <p:cNvSpPr/>
-          <p:nvPr/>
-        </p:nvSpPr>
-        <p:spPr>
-          <a:xfrm>
-            <a:off x="4069080" y="2240280"/>
-            <a:ext cx="7802575" cy="4206240"/>
-          </a:xfrm>
-          <a:prstGeom prst="rect">
-            <a:avLst/>
-          </a:prstGeom>
-          <a:noFill/>
-          <a:ln/>
-        </p:spPr>
-        <p:txBody>
-          <a:bodyPr wrap="square" lIns="0" tIns="0" rIns="0" bIns="0" rtlCol="0" anchor="t"/>
-          <a:lstStyle/>
-          <a:p>
-            <a:pPr algn="l" indent="0" marL="0">
-              <a:spcAft>
-                <a:spcPts val="800"/>
-              </a:spcAft>
-              <a:buNone/>
-            </a:pPr>
-            <a:r>
-              <a:rPr lang="en-US" sz="4000" i="1" dirty="0">
-                <a:solidFill>
-                  <a:srgbClr val="111111"/>
-                </a:solidFill>
-                <a:latin typeface="Times New Roman" pitchFamily="34" charset="0"/>
-                <a:ea typeface="Times New Roman" pitchFamily="34" charset="-122"/>
-                <a:cs typeface="Times New Roman" pitchFamily="34" charset="-120"/>
-              </a:rPr>
-              <a:t>The Chinese anti-natalist policy is presented as follows:</a:t>
-            </a:r>
-            <a:endParaRPr lang="en-US" sz="4000" dirty="0"/>
-          </a:p>
-          <a:p>
-            <a:pPr algn="l" indent="0" marL="0">
-              <a:spcAft>
-                <a:spcPts val="800"/>
-              </a:spcAft>
-              <a:buNone/>
-            </a:pPr>
-            <a:r>
-              <a:rPr lang="en-US" sz="4000" b="1" dirty="0">
-                <a:solidFill>
-                  <a:srgbClr val="111111"/>
-                </a:solidFill>
-                <a:latin typeface="Times New Roman" pitchFamily="34" charset="0"/>
-                <a:ea typeface="Times New Roman" pitchFamily="34" charset="-122"/>
-                <a:cs typeface="Times New Roman" pitchFamily="34" charset="-120"/>
-              </a:rPr>
-              <a:t>Aim: </a:t>
-            </a:r>
-            <a:pPr algn="l" indent="0" marL="0">
-              <a:spcAft>
-                <a:spcPts val="800"/>
-              </a:spcAft>
-              <a:buNone/>
-            </a:pPr>
-            <a:r>
-              <a:rPr lang="en-US" sz="4000" dirty="0">
-                <a:solidFill>
-                  <a:srgbClr val="111111"/>
-                </a:solidFill>
-                <a:latin typeface="Times New Roman" pitchFamily="34" charset="0"/>
-                <a:ea typeface="Times New Roman" pitchFamily="34" charset="-122"/>
-                <a:cs typeface="Times New Roman" pitchFamily="34" charset="-120"/>
-              </a:rPr>
-              <a:t>Anti-natalist policies slow down growth in countries where population grows too fast.</a:t>
-            </a:r>
-            <a:endParaRPr lang="en-US" sz="4000" dirty="0"/>
+              <a:t>Illustration: the one-child policy</a:t>
+            </a:r>
+            <a:endParaRPr lang="en-US" sz="1600" dirty="0"/>
           </a:p>
         </p:txBody>
       </p:sp>
@@ -19962,150 +19989,9 @@
           </a:p>
         </p:txBody>
       </p:sp>
-      <p:sp>
-        <p:nvSpPr>
-          <p:cNvPr id="3" name="Text 1"/>
-          <p:cNvSpPr/>
-          <p:nvPr/>
-        </p:nvSpPr>
-        <p:spPr>
-          <a:xfrm>
-            <a:off x="365760" y="1005840"/>
-            <a:ext cx="11460175" cy="731520"/>
-          </a:xfrm>
-          <a:prstGeom prst="rect">
-            <a:avLst/>
-          </a:prstGeom>
-          <a:noFill/>
-          <a:ln/>
-        </p:spPr>
-        <p:txBody>
-          <a:bodyPr wrap="square" lIns="0" tIns="0" rIns="0" bIns="0" rtlCol="0" anchor="ctr">
-            <a:normAutofit/>
-          </a:bodyPr>
-          <a:lstStyle/>
-          <a:p>
-            <a:pPr algn="ctr" indent="0" marL="0">
-              <a:buNone/>
-            </a:pPr>
-            <a:r>
-              <a:rPr lang="en-US" sz="3600" b="1" dirty="0">
-                <a:solidFill>
-                  <a:srgbClr val="990011"/>
-                </a:solidFill>
-                <a:latin typeface="Times New Roman" pitchFamily="34" charset="0"/>
-                <a:ea typeface="Times New Roman" pitchFamily="34" charset="-122"/>
-                <a:cs typeface="Times New Roman" pitchFamily="34" charset="-120"/>
-              </a:rPr>
-              <a:t>2. Managing Population Growth</a:t>
-            </a:r>
-            <a:endParaRPr lang="en-US" sz="3600" dirty="0"/>
-          </a:p>
-        </p:txBody>
-      </p:sp>
-      <p:sp>
-        <p:nvSpPr>
-          <p:cNvPr id="4" name="Text 2"/>
-          <p:cNvSpPr/>
-          <p:nvPr/>
-        </p:nvSpPr>
-        <p:spPr>
-          <a:xfrm>
-            <a:off x="365760" y="1737360"/>
-            <a:ext cx="5120640" cy="457200"/>
-          </a:xfrm>
-          <a:prstGeom prst="rect">
-            <a:avLst/>
-          </a:prstGeom>
-          <a:noFill/>
-          <a:ln/>
-        </p:spPr>
-        <p:txBody>
-          <a:bodyPr wrap="square" lIns="0" tIns="0" rIns="0" bIns="0" rtlCol="0" anchor="ctr">
-            <a:normAutofit/>
-          </a:bodyPr>
-          <a:lstStyle/>
-          <a:p>
-            <a:pPr algn="l" indent="0" marL="0">
-              <a:buNone/>
-            </a:pPr>
-            <a:r>
-              <a:rPr lang="en-US" sz="3000" b="1" dirty="0">
-                <a:solidFill>
-                  <a:srgbClr val="990011"/>
-                </a:solidFill>
-                <a:latin typeface="Times New Roman" pitchFamily="34" charset="0"/>
-                <a:ea typeface="Times New Roman" pitchFamily="34" charset="-122"/>
-                <a:cs typeface="Times New Roman" pitchFamily="34" charset="-120"/>
-              </a:rPr>
-              <a:t>B) Anti-Natalist Policies: the Chinese Experience</a:t>
-            </a:r>
-            <a:endParaRPr lang="en-US" sz="3000" dirty="0"/>
-          </a:p>
-        </p:txBody>
-      </p:sp>
-      <p:sp>
-        <p:nvSpPr>
-          <p:cNvPr id="5" name="Text 3"/>
-          <p:cNvSpPr/>
-          <p:nvPr/>
-        </p:nvSpPr>
-        <p:spPr>
-          <a:xfrm>
-            <a:off x="365760" y="2240280"/>
-            <a:ext cx="4846320" cy="4160520"/>
-          </a:xfrm>
-          <a:prstGeom prst="rect">
-            <a:avLst/>
-          </a:prstGeom>
-          <a:noFill/>
-          <a:ln/>
-        </p:spPr>
-        <p:txBody>
-          <a:bodyPr wrap="square" lIns="0" tIns="0" rIns="0" bIns="0" rtlCol="0" anchor="t"/>
-          <a:lstStyle/>
-          <a:p>
-            <a:pPr algn="l" indent="0" marL="0">
-              <a:spcAft>
-                <a:spcPts val="800"/>
-              </a:spcAft>
-              <a:buNone/>
-            </a:pPr>
-            <a:r>
-              <a:rPr lang="en-US" sz="3600" b="1" dirty="0">
-                <a:solidFill>
-                  <a:srgbClr val="111111"/>
-                </a:solidFill>
-                <a:latin typeface="Times New Roman" pitchFamily="34" charset="0"/>
-                <a:ea typeface="Times New Roman" pitchFamily="34" charset="-122"/>
-                <a:cs typeface="Times New Roman" pitchFamily="34" charset="-120"/>
-              </a:rPr>
-              <a:t>The one-child policy: </a:t>
-            </a:r>
-            <a:pPr algn="l" indent="0" marL="0">
-              <a:spcAft>
-                <a:spcPts val="800"/>
-              </a:spcAft>
-              <a:buNone/>
-            </a:pPr>
-            <a:r>
-              <a:rPr lang="en-US" sz="3600" dirty="0">
-                <a:solidFill>
-                  <a:srgbClr val="111111"/>
-                </a:solidFill>
-                <a:latin typeface="Times New Roman" pitchFamily="34" charset="0"/>
-                <a:ea typeface="Times New Roman" pitchFamily="34" charset="-122"/>
-                <a:cs typeface="Times New Roman" pitchFamily="34" charset="-120"/>
-              </a:rPr>
-              <a:t>From about 1980 to 2015, most Chinese couples were allowed only one child.</a:t>
-            </a:r>
-            <a:endParaRPr lang="en-US" sz="3600" dirty="0"/>
-          </a:p>
-        </p:txBody>
-      </p:sp>
       <p:pic>
         <p:nvPicPr>
-          <p:cNvPr id="6" name="Image 0" descr="/home/claude/f4/img/v2/usa_onechild.jpg">    </p:cNvPr>
+          <p:cNvPr id="3" name="Image 0" descr="/home/claude/f4/img/minesec_sheet.png">    </p:cNvPr>
           <p:cNvPicPr>
             <a:picLocks noChangeAspect="1"/>
           </p:cNvPicPr>
@@ -20119,8 +20005,8 @@
         </p:blipFill>
         <p:spPr>
           <a:xfrm>
-            <a:off x="5349240" y="2071212"/>
-            <a:ext cx="6659575" cy="3693983"/>
+            <a:off x="0" y="658368"/>
+            <a:ext cx="3840480" cy="5833872"/>
           </a:xfrm>
           <a:prstGeom prst="rect">
             <a:avLst/>
@@ -20129,14 +20015,14 @@
       </p:pic>
       <p:sp>
         <p:nvSpPr>
-          <p:cNvPr id="7" name="Text 4"/>
+          <p:cNvPr id="4" name="Text 1"/>
           <p:cNvSpPr/>
           <p:nvPr/>
         </p:nvSpPr>
         <p:spPr>
           <a:xfrm>
-            <a:off x="5349240" y="6089904"/>
-            <a:ext cx="6659575" cy="347472"/>
+            <a:off x="4069080" y="1005840"/>
+            <a:ext cx="7802575" cy="731520"/>
           </a:xfrm>
           <a:prstGeom prst="rect">
             <a:avLst/>
@@ -20145,24 +20031,124 @@
           <a:ln/>
         </p:spPr>
         <p:txBody>
-          <a:bodyPr wrap="square" lIns="0" tIns="0" rIns="0" bIns="0" rtlCol="0" anchor="ctr"/>
+          <a:bodyPr wrap="square" lIns="0" tIns="0" rIns="0" bIns="0" rtlCol="0" anchor="ctr">
+            <a:normAutofit/>
+          </a:bodyPr>
           <a:lstStyle/>
           <a:p>
             <a:pPr algn="ctr" indent="0" marL="0">
               <a:buNone/>
             </a:pPr>
             <a:r>
-              <a:rPr lang="en-US" sz="1600" i="1" dirty="0">
-                <a:solidFill>
-                  <a:srgbClr val="555555"/>
+              <a:rPr lang="en-US" sz="3600" b="1" dirty="0">
+                <a:solidFill>
+                  <a:srgbClr val="990011"/>
                 </a:solidFill>
                 <a:latin typeface="Times New Roman" pitchFamily="34" charset="0"/>
                 <a:ea typeface="Times New Roman" pitchFamily="34" charset="-122"/>
                 <a:cs typeface="Times New Roman" pitchFamily="34" charset="-120"/>
               </a:rPr>
-              <a:t>Illustration: a family policy poster</a:t>
-            </a:r>
-            <a:endParaRPr lang="en-US" sz="1600" dirty="0"/>
+              <a:t>2. Managing Population Growth</a:t>
+            </a:r>
+            <a:endParaRPr lang="en-US" sz="3600" dirty="0"/>
+          </a:p>
+        </p:txBody>
+      </p:sp>
+      <p:sp>
+        <p:nvSpPr>
+          <p:cNvPr id="5" name="Text 2"/>
+          <p:cNvSpPr/>
+          <p:nvPr/>
+        </p:nvSpPr>
+        <p:spPr>
+          <a:xfrm>
+            <a:off x="4069080" y="1737360"/>
+            <a:ext cx="7802575" cy="457200"/>
+          </a:xfrm>
+          <a:prstGeom prst="rect">
+            <a:avLst/>
+          </a:prstGeom>
+          <a:noFill/>
+          <a:ln/>
+        </p:spPr>
+        <p:txBody>
+          <a:bodyPr wrap="square" lIns="0" tIns="0" rIns="0" bIns="0" rtlCol="0" anchor="ctr"/>
+          <a:lstStyle/>
+          <a:p>
+            <a:pPr algn="l" indent="0" marL="0">
+              <a:buNone/>
+            </a:pPr>
+            <a:r>
+              <a:rPr lang="en-US" sz="2600" b="1" dirty="0">
+                <a:solidFill>
+                  <a:srgbClr val="990011"/>
+                </a:solidFill>
+                <a:latin typeface="Times New Roman" pitchFamily="34" charset="0"/>
+                <a:ea typeface="Times New Roman" pitchFamily="34" charset="-122"/>
+                <a:cs typeface="Times New Roman" pitchFamily="34" charset="-120"/>
+              </a:rPr>
+              <a:t>B) Anti-Natal Policies: the Chinese Experience</a:t>
+            </a:r>
+            <a:endParaRPr lang="en-US" sz="2600" dirty="0"/>
+          </a:p>
+        </p:txBody>
+      </p:sp>
+      <p:sp>
+        <p:nvSpPr>
+          <p:cNvPr id="6" name="Text 3"/>
+          <p:cNvSpPr/>
+          <p:nvPr/>
+        </p:nvSpPr>
+        <p:spPr>
+          <a:xfrm>
+            <a:off x="4069080" y="2240280"/>
+            <a:ext cx="7802575" cy="4206240"/>
+          </a:xfrm>
+          <a:prstGeom prst="rect">
+            <a:avLst/>
+          </a:prstGeom>
+          <a:noFill/>
+          <a:ln/>
+        </p:spPr>
+        <p:txBody>
+          <a:bodyPr wrap="square" lIns="0" tIns="0" rIns="0" bIns="0" rtlCol="0" anchor="t"/>
+          <a:lstStyle/>
+          <a:p>
+            <a:pPr algn="l" indent="0" marL="0">
+              <a:spcAft>
+                <a:spcPts val="800"/>
+              </a:spcAft>
+              <a:buNone/>
+            </a:pPr>
+            <a:r>
+              <a:rPr lang="en-US" sz="4000" b="1" dirty="0">
+                <a:solidFill>
+                  <a:srgbClr val="111111"/>
+                </a:solidFill>
+                <a:latin typeface="Times New Roman" pitchFamily="34" charset="0"/>
+                <a:ea typeface="Times New Roman" pitchFamily="34" charset="-122"/>
+                <a:cs typeface="Times New Roman" pitchFamily="34" charset="-120"/>
+              </a:rPr>
+              <a:t>Incentives and penalties: </a:t>
+            </a:r>
+            <a:pPr algn="l" indent="0" marL="0">
+              <a:spcAft>
+                <a:spcPts val="800"/>
+              </a:spcAft>
+              <a:buNone/>
+            </a:pPr>
+            <a:r>
+              <a:rPr lang="en-US" sz="4000" dirty="0">
+                <a:solidFill>
+                  <a:srgbClr val="111111"/>
+                </a:solidFill>
+                <a:latin typeface="Times New Roman" pitchFamily="34" charset="0"/>
+                <a:ea typeface="Times New Roman" pitchFamily="34" charset="-122"/>
+                <a:cs typeface="Times New Roman" pitchFamily="34" charset="-120"/>
+              </a:rPr>
+              <a:t>Families who obeyed received better housing, free education and health care for their child. Those who had more children paid heavy fines and faced social pressure.</a:t>
+            </a:r>
+            <a:endParaRPr lang="en-US" sz="4000" dirty="0"/>
           </a:p>
         </p:txBody>
       </p:sp>
@@ -20295,7 +20281,7 @@
         <p:spPr>
           <a:xfrm>
             <a:off x="0" y="658368"/>
-            <a:ext cx="2468880" cy="5833872"/>
+            <a:ext cx="5120640" cy="5833872"/>
           </a:xfrm>
           <a:prstGeom prst="rect">
             <a:avLst/>
@@ -20310,8 +20296,8 @@
         </p:nvSpPr>
         <p:spPr>
           <a:xfrm>
-            <a:off x="2697480" y="1005840"/>
-            <a:ext cx="9174175" cy="731520"/>
+            <a:off x="5349240" y="1005840"/>
+            <a:ext cx="6522415" cy="731520"/>
           </a:xfrm>
           <a:prstGeom prst="rect">
             <a:avLst/>
@@ -20351,8 +20337,8 @@
         </p:nvSpPr>
         <p:spPr>
           <a:xfrm>
-            <a:off x="2697480" y="1737360"/>
-            <a:ext cx="9174175" cy="457200"/>
+            <a:off x="5349240" y="1737360"/>
+            <a:ext cx="6522415" cy="457200"/>
           </a:xfrm>
           <a:prstGeom prst="rect">
             <a:avLst/>
@@ -20368,7 +20354,7 @@
               <a:buNone/>
             </a:pPr>
             <a:r>
-              <a:rPr lang="en-US" sz="2900" b="1" dirty="0">
+              <a:rPr lang="en-US" sz="2200" b="1" dirty="0">
                 <a:solidFill>
                   <a:srgbClr val="990011"/>
                 </a:solidFill>
@@ -20376,9 +20362,9 @@
                 <a:ea typeface="Times New Roman" pitchFamily="34" charset="-122"/>
                 <a:cs typeface="Times New Roman" pitchFamily="34" charset="-120"/>
               </a:rPr>
-              <a:t>B) Anti-Natalist Policies: the Chinese Experience</a:t>
-            </a:r>
-            <a:endParaRPr lang="en-US" sz="2900" dirty="0"/>
+              <a:t>B) Anti-Natal Policies: the Chinese Experience</a:t>
+            </a:r>
+            <a:endParaRPr lang="en-US" sz="2200" dirty="0"/>
           </a:p>
         </p:txBody>
       </p:sp>
@@ -20390,8 +20376,8 @@
         </p:nvSpPr>
         <p:spPr>
           <a:xfrm>
-            <a:off x="2697480" y="2240280"/>
-            <a:ext cx="9174175" cy="4206240"/>
+            <a:off x="5349240" y="2240280"/>
+            <a:ext cx="6522415" cy="4206240"/>
           </a:xfrm>
           <a:prstGeom prst="rect">
             <a:avLst/>
@@ -20418,7 +20404,7 @@
                 <a:ea typeface="Times New Roman" pitchFamily="34" charset="-122"/>
                 <a:cs typeface="Times New Roman" pitchFamily="34" charset="-120"/>
               </a:rPr>
-              <a:t>Incentives and penalties: </a:t>
+              <a:t>Positive results: </a:t>
             </a:r>
             <a:pPr algn="l" indent="0" marL="0">
               <a:spcAft>
@@ -20435,48 +20421,7 @@
                 <a:ea typeface="Times New Roman" pitchFamily="34" charset="-122"/>
                 <a:cs typeface="Times New Roman" pitchFamily="34" charset="-120"/>
               </a:rPr>
-              <a:t>Obedient families received better housing and free education, while others paid fines and faced social pressure.</a:t>
-            </a:r>
-            <a:endParaRPr lang="en-US" sz="4000" dirty="0"/>
-          </a:p>
-          <a:p>
-            <a:pPr algn="l" indent="0" marL="0">
-              <a:spcAft>
-                <a:spcPts val="800"/>
-              </a:spcAft>
-              <a:buNone/>
-            </a:pPr>
-            <a:r>
-              <a:rPr lang="en-US" sz="4000" b="1" dirty="0">
-                <a:solidFill>
-                  <a:srgbClr val="111111"/>
-                </a:solidFill>
-                <a:latin typeface="Times New Roman" pitchFamily="34" charset="0"/>
-                <a:ea typeface="Times New Roman" pitchFamily="34" charset="-122"/>
-                <a:cs typeface="Times New Roman" pitchFamily="34" charset="-120"/>
-              </a:rPr>
-              <a:t>Results:</a:t>
-            </a:r>
-            <a:endParaRPr lang="en-US" sz="4000" dirty="0"/>
-          </a:p>
-          <a:p>
-            <a:pPr algn="l" marL="342900" indent="-342900">
-              <a:spcAft>
-                <a:spcPts val="800"/>
-              </a:spcAft>
-              <a:buSzPct val="100000"/>
-              <a:buChar char="•"/>
-            </a:pPr>
-            <a:r>
-              <a:rPr lang="en-US" sz="4000" dirty="0">
-                <a:solidFill>
-                  <a:srgbClr val="111111"/>
-                </a:solidFill>
-                <a:latin typeface="Times New Roman" pitchFamily="34" charset="0"/>
-                <a:ea typeface="Times New Roman" pitchFamily="34" charset="-122"/>
-                <a:cs typeface="Times New Roman" pitchFamily="34" charset="-120"/>
-              </a:rPr>
-              <a:t>Growth slowed down sharply.</a:t>
+              <a:t>Growth slowed down sharply, and about 400 million births may have been avoided. This helped China to raise living standards.</a:t>
             </a:r>
             <a:endParaRPr lang="en-US" sz="4000" dirty="0"/>
           </a:p>
@@ -20684,7 +20629,7 @@
               <a:buNone/>
             </a:pPr>
             <a:r>
-              <a:rPr lang="en-US" sz="1600" b="1" dirty="0">
+              <a:rPr lang="en-US" sz="2200" b="1" dirty="0">
                 <a:solidFill>
                   <a:srgbClr val="990011"/>
                 </a:solidFill>
@@ -20692,9 +20637,9 @@
                 <a:ea typeface="Times New Roman" pitchFamily="34" charset="-122"/>
                 <a:cs typeface="Times New Roman" pitchFamily="34" charset="-120"/>
               </a:rPr>
-              <a:t>B) Anti-Natalist Policies: the Chinese Experience (continued)</a:t>
-            </a:r>
-            <a:endParaRPr lang="en-US" sz="1600" dirty="0"/>
+              <a:t>B) Anti-Natal Policies: the Chinese Experience</a:t>
+            </a:r>
+            <a:endParaRPr lang="en-US" sz="2200" dirty="0"/>
           </a:p>
         </p:txBody>
       </p:sp>
@@ -20719,15 +20664,14 @@
           <a:bodyPr wrap="square" lIns="0" tIns="0" rIns="0" bIns="0" rtlCol="0" anchor="t"/>
           <a:lstStyle/>
           <a:p>
-            <a:pPr algn="l" marL="342900" indent="-342900">
+            <a:pPr algn="l" indent="0" marL="0">
               <a:spcAft>
                 <a:spcPts val="800"/>
               </a:spcAft>
-              <a:buSzPct val="100000"/>
-              <a:buChar char="•"/>
-            </a:pPr>
-            <a:r>
-              <a:rPr lang="en-US" sz="4000" dirty="0">
+              <a:buNone/>
+            </a:pPr>
+            <a:r>
+              <a:rPr lang="en-US" sz="4000" b="1" dirty="0">
                 <a:solidFill>
                   <a:srgbClr val="111111"/>
                 </a:solidFill>
@@ -20735,17 +20679,13 @@
                 <a:ea typeface="Times New Roman" pitchFamily="34" charset="-122"/>
                 <a:cs typeface="Times New Roman" pitchFamily="34" charset="-120"/>
               </a:rPr>
-              <a:t>Many more boys than girls were born.</a:t>
-            </a:r>
-            <a:endParaRPr lang="en-US" sz="4000" dirty="0"/>
-          </a:p>
-          <a:p>
-            <a:pPr algn="l" marL="342900" indent="-342900">
+              <a:t>Negative results: </a:t>
+            </a:r>
+            <a:pPr algn="l" indent="0" marL="0">
               <a:spcAft>
                 <a:spcPts val="800"/>
               </a:spcAft>
-              <a:buSzPct val="100000"/>
-              <a:buChar char="•"/>
+              <a:buNone/>
             </a:pPr>
             <a:r>
               <a:rPr lang="en-US" sz="4000" dirty="0">
@@ -20756,28 +20696,7 @@
                 <a:ea typeface="Times New Roman" pitchFamily="34" charset="-122"/>
                 <a:cs typeface="Times New Roman" pitchFamily="34" charset="-120"/>
               </a:rPr>
-              <a:t>The population aged rapidly.</a:t>
-            </a:r>
-            <a:endParaRPr lang="en-US" sz="4000" dirty="0"/>
-          </a:p>
-          <a:p>
-            <a:pPr algn="l" marL="342900" indent="-342900">
-              <a:spcAft>
-                <a:spcPts val="800"/>
-              </a:spcAft>
-              <a:buSzPct val="100000"/>
-              <a:buChar char="•"/>
-            </a:pPr>
-            <a:r>
-              <a:rPr lang="en-US" sz="4000" dirty="0">
-                <a:solidFill>
-                  <a:srgbClr val="111111"/>
-                </a:solidFill>
-                <a:latin typeface="Times New Roman" pitchFamily="34" charset="0"/>
-                <a:ea typeface="Times New Roman" pitchFamily="34" charset="-122"/>
-                <a:cs typeface="Times New Roman" pitchFamily="34" charset="-120"/>
-              </a:rPr>
-              <a:t>China now allows three children per couple.</a:t>
+              <a:t>Many more boys than girls were born, and the population aged rapidly. China therefore allowed two children in 2016 and three in 2021.</a:t>
             </a:r>
             <a:endParaRPr lang="en-US" sz="4000" dirty="0"/>
           </a:p>
@@ -20912,7 +20831,7 @@
         <p:spPr>
           <a:xfrm>
             <a:off x="0" y="658368"/>
-            <a:ext cx="2468880" cy="5833872"/>
+            <a:ext cx="1463040" cy="5833872"/>
           </a:xfrm>
           <a:prstGeom prst="rect">
             <a:avLst/>
@@ -20927,8 +20846,8 @@
         </p:nvSpPr>
         <p:spPr>
           <a:xfrm>
-            <a:off x="2697480" y="1005840"/>
-            <a:ext cx="9174175" cy="731520"/>
+            <a:off x="1691640" y="1005840"/>
+            <a:ext cx="10180015" cy="731520"/>
           </a:xfrm>
           <a:prstGeom prst="rect">
             <a:avLst/>
@@ -20968,8 +20887,8 @@
         </p:nvSpPr>
         <p:spPr>
           <a:xfrm>
-            <a:off x="2697480" y="1737360"/>
-            <a:ext cx="9174175" cy="457200"/>
+            <a:off x="1691640" y="1737360"/>
+            <a:ext cx="10180015" cy="457200"/>
           </a:xfrm>
           <a:prstGeom prst="rect">
             <a:avLst/>
@@ -20993,7 +20912,7 @@
                 <a:ea typeface="Times New Roman" pitchFamily="34" charset="-122"/>
                 <a:cs typeface="Times New Roman" pitchFamily="34" charset="-120"/>
               </a:rPr>
-              <a:t>C) Migration Laws</a:t>
+              <a:t>C) Migration Laws: the US and Canadian Cases</a:t>
             </a:r>
             <a:endParaRPr lang="en-US" sz="3200" dirty="0"/>
           </a:p>
@@ -21007,8 +20926,8 @@
         </p:nvSpPr>
         <p:spPr>
           <a:xfrm>
-            <a:off x="2697480" y="2240280"/>
-            <a:ext cx="9174175" cy="4206240"/>
+            <a:off x="1691640" y="2240280"/>
+            <a:ext cx="10180015" cy="4206240"/>
           </a:xfrm>
           <a:prstGeom prst="rect">
             <a:avLst/>
@@ -21027,7 +20946,7 @@
               <a:buNone/>
             </a:pPr>
             <a:r>
-              <a:rPr lang="en-US" sz="4000" i="1" dirty="0">
+              <a:rPr lang="en-US" sz="3600" i="1" dirty="0">
                 <a:solidFill>
                   <a:srgbClr val="111111"/>
                 </a:solidFill>
@@ -21035,9 +20954,9 @@
                 <a:ea typeface="Times New Roman" pitchFamily="34" charset="-122"/>
                 <a:cs typeface="Times New Roman" pitchFamily="34" charset="-120"/>
               </a:rPr>
-              <a:t>Migration laws are used as follows:</a:t>
-            </a:r>
-            <a:endParaRPr lang="en-US" sz="4000" dirty="0"/>
+              <a:t>Migration laws are applied in the following ways:</a:t>
+            </a:r>
+            <a:endParaRPr lang="en-US" sz="3600" dirty="0"/>
           </a:p>
           <a:p>
             <a:pPr algn="l" indent="0" marL="0">
@@ -21047,7 +20966,7 @@
               <a:buNone/>
             </a:pPr>
             <a:r>
-              <a:rPr lang="en-US" sz="4000" b="1" dirty="0">
+              <a:rPr lang="en-US" sz="3600" b="1" dirty="0">
                 <a:solidFill>
                   <a:srgbClr val="111111"/>
                 </a:solidFill>
@@ -21055,7 +20974,7 @@
                 <a:ea typeface="Times New Roman" pitchFamily="34" charset="-122"/>
                 <a:cs typeface="Times New Roman" pitchFamily="34" charset="-120"/>
               </a:rPr>
-              <a:t>Restrictive policies: </a:t>
+              <a:t>Restrictive laws, the United States: </a:t>
             </a:r>
             <a:pPr algn="l" indent="0" marL="0">
               <a:spcAft>
@@ -21064,7 +20983,7 @@
               <a:buNone/>
             </a:pPr>
             <a:r>
-              <a:rPr lang="en-US" sz="4000" dirty="0">
+              <a:rPr lang="en-US" sz="3600" dirty="0">
                 <a:solidFill>
                   <a:srgbClr val="111111"/>
                 </a:solidFill>
@@ -21072,9 +20991,9 @@
                 <a:ea typeface="Times New Roman" pitchFamily="34" charset="-122"/>
                 <a:cs typeface="Times New Roman" pitchFamily="34" charset="-120"/>
               </a:rPr>
-              <a:t>Some countries limit immigration with strict visas, quotas and border controls, as in the USA and many European countries.</a:t>
-            </a:r>
-            <a:endParaRPr lang="en-US" sz="4000" dirty="0"/>
+              <a:t>The USA limits immigration with strict visas, quotas by country and strong border controls. Most legal immigrants enter through family links or employers, and a lottery offers some green cards.</a:t>
+            </a:r>
+            <a:endParaRPr lang="en-US" sz="3600" dirty="0"/>
           </a:p>
         </p:txBody>
       </p:sp>
@@ -21207,7 +21126,7 @@
         <p:spPr>
           <a:xfrm>
             <a:off x="0" y="658368"/>
-            <a:ext cx="1463040" cy="5833872"/>
+            <a:ext cx="2468880" cy="5833872"/>
           </a:xfrm>
           <a:prstGeom prst="rect">
             <a:avLst/>
@@ -21222,8 +21141,8 @@
         </p:nvSpPr>
         <p:spPr>
           <a:xfrm>
-            <a:off x="1691640" y="1005840"/>
-            <a:ext cx="10180015" cy="731520"/>
+            <a:off x="2697480" y="1005840"/>
+            <a:ext cx="9174175" cy="731520"/>
           </a:xfrm>
           <a:prstGeom prst="rect">
             <a:avLst/>
@@ -21263,8 +21182,8 @@
         </p:nvSpPr>
         <p:spPr>
           <a:xfrm>
-            <a:off x="1691640" y="1737360"/>
-            <a:ext cx="10180015" cy="457200"/>
+            <a:off x="2697480" y="1737360"/>
+            <a:ext cx="9174175" cy="457200"/>
           </a:xfrm>
           <a:prstGeom prst="rect">
             <a:avLst/>
@@ -21288,7 +21207,7 @@
                 <a:ea typeface="Times New Roman" pitchFamily="34" charset="-122"/>
                 <a:cs typeface="Times New Roman" pitchFamily="34" charset="-120"/>
               </a:rPr>
-              <a:t>C) Migration Laws (continued)</a:t>
+              <a:t>C) Migration Laws: the US and Canadian Cases</a:t>
             </a:r>
             <a:endParaRPr lang="en-US" sz="3200" dirty="0"/>
           </a:p>
@@ -21302,8 +21221,8 @@
         </p:nvSpPr>
         <p:spPr>
           <a:xfrm>
-            <a:off x="1691640" y="2240280"/>
-            <a:ext cx="10180015" cy="4206240"/>
+            <a:off x="2697480" y="2240280"/>
+            <a:ext cx="9174175" cy="4206240"/>
           </a:xfrm>
           <a:prstGeom prst="rect">
             <a:avLst/>
@@ -21330,7 +21249,7 @@
                 <a:ea typeface="Times New Roman" pitchFamily="34" charset="-122"/>
                 <a:cs typeface="Times New Roman" pitchFamily="34" charset="-120"/>
               </a:rPr>
-              <a:t>Selective policies: </a:t>
+              <a:t>Relaxed and selective laws, Canada: </a:t>
             </a:r>
             <a:pPr algn="l" indent="0" marL="0">
               <a:spcAft>
@@ -21347,44 +21266,7 @@
                 <a:ea typeface="Times New Roman" pitchFamily="34" charset="-122"/>
                 <a:cs typeface="Times New Roman" pitchFamily="34" charset="-120"/>
               </a:rPr>
-              <a:t>Canada and Australia attract skilled workers with a points-based system (education, skills, languages).</a:t>
-            </a:r>
-            <a:endParaRPr lang="en-US" sz="4000" dirty="0"/>
-          </a:p>
-          <a:p>
-            <a:pPr algn="l" indent="0" marL="0">
-              <a:spcAft>
-                <a:spcPts val="800"/>
-              </a:spcAft>
-              <a:buNone/>
-            </a:pPr>
-            <a:r>
-              <a:rPr lang="en-US" sz="4000" b="1" dirty="0">
-                <a:solidFill>
-                  <a:srgbClr val="111111"/>
-                </a:solidFill>
-                <a:latin typeface="Times New Roman" pitchFamily="34" charset="0"/>
-                <a:ea typeface="Times New Roman" pitchFamily="34" charset="-122"/>
-                <a:cs typeface="Times New Roman" pitchFamily="34" charset="-120"/>
-              </a:rPr>
-              <a:t>Aim: </a:t>
-            </a:r>
-            <a:pPr algn="l" indent="0" marL="0">
-              <a:spcAft>
-                <a:spcPts val="800"/>
-              </a:spcAft>
-              <a:buNone/>
-            </a:pPr>
-            <a:r>
-              <a:rPr lang="en-US" sz="4000" dirty="0">
-                <a:solidFill>
-                  <a:srgbClr val="111111"/>
-                </a:solidFill>
-                <a:latin typeface="Times New Roman" pitchFamily="34" charset="0"/>
-                <a:ea typeface="Times New Roman" pitchFamily="34" charset="-122"/>
-                <a:cs typeface="Times New Roman" pitchFamily="34" charset="-120"/>
-              </a:rPr>
-              <a:t>Migration laws help to fill labour shortages or to protect jobs and services.</a:t>
+              <a:t>Canada welcomes many immigrants, about 1 % of its population each year, to fill labour shortages. A points-based system selects them by education, skills, age and languages.</a:t>
             </a:r>
             <a:endParaRPr lang="en-US" sz="4000" dirty="0"/>
           </a:p>
@@ -21496,7 +21378,7 @@
                 <a:ea typeface="Calibri" pitchFamily="34" charset="-122"/>
                 <a:cs typeface="Calibri" pitchFamily="34" charset="-120"/>
               </a:rPr>
-              <a:t>FORMATIVE EVALUATION</a:t>
+              <a:t>BOARD SUMMARY</a:t>
             </a:r>
             <a:endParaRPr lang="en-US" sz="1400" dirty="0"/>
           </a:p>
@@ -21519,7 +21401,7 @@
         <p:spPr>
           <a:xfrm>
             <a:off x="0" y="658368"/>
-            <a:ext cx="5120640" cy="5833872"/>
+            <a:ext cx="3840480" cy="5833872"/>
           </a:xfrm>
           <a:prstGeom prst="rect">
             <a:avLst/>
@@ -21534,8 +21416,8 @@
         </p:nvSpPr>
         <p:spPr>
           <a:xfrm>
-            <a:off x="5349240" y="1005840"/>
-            <a:ext cx="6522415" cy="731520"/>
+            <a:off x="4069080" y="1005840"/>
+            <a:ext cx="7802575" cy="731520"/>
           </a:xfrm>
           <a:prstGeom prst="rect">
             <a:avLst/>
@@ -21561,7 +21443,7 @@
                 <a:ea typeface="Times New Roman" pitchFamily="34" charset="-122"/>
                 <a:cs typeface="Times New Roman" pitchFamily="34" charset="-120"/>
               </a:rPr>
-              <a:t>Evaluation 1</a:t>
+              <a:t>2. Managing Population Growth</a:t>
             </a:r>
             <a:endParaRPr lang="en-US" sz="3600" dirty="0"/>
           </a:p>
@@ -21575,8 +21457,47 @@
         </p:nvSpPr>
         <p:spPr>
           <a:xfrm>
-            <a:off x="5349240" y="1783080"/>
-            <a:ext cx="6522415" cy="4663440"/>
+            <a:off x="4069080" y="1737360"/>
+            <a:ext cx="7802575" cy="457200"/>
+          </a:xfrm>
+          <a:prstGeom prst="rect">
+            <a:avLst/>
+          </a:prstGeom>
+          <a:noFill/>
+          <a:ln/>
+        </p:spPr>
+        <p:txBody>
+          <a:bodyPr wrap="square" lIns="0" tIns="0" rIns="0" bIns="0" rtlCol="0" anchor="ctr"/>
+          <a:lstStyle/>
+          <a:p>
+            <a:pPr algn="l" indent="0" marL="0">
+              <a:buNone/>
+            </a:pPr>
+            <a:r>
+              <a:rPr lang="en-US" sz="2700" b="1" dirty="0">
+                <a:solidFill>
+                  <a:srgbClr val="990011"/>
+                </a:solidFill>
+                <a:latin typeface="Times New Roman" pitchFamily="34" charset="0"/>
+                <a:ea typeface="Times New Roman" pitchFamily="34" charset="-122"/>
+                <a:cs typeface="Times New Roman" pitchFamily="34" charset="-120"/>
+              </a:rPr>
+              <a:t>C) Migration Laws: the US and Canadian Cases</a:t>
+            </a:r>
+            <a:endParaRPr lang="en-US" sz="2700" dirty="0"/>
+          </a:p>
+        </p:txBody>
+      </p:sp>
+      <p:sp>
+        <p:nvSpPr>
+          <p:cNvPr id="6" name="Text 3"/>
+          <p:cNvSpPr/>
+          <p:nvPr/>
+        </p:nvSpPr>
+        <p:spPr>
+          <a:xfrm>
+            <a:off x="4069080" y="2240280"/>
+            <a:ext cx="7802575" cy="4206240"/>
           </a:xfrm>
           <a:prstGeom prst="rect">
             <a:avLst/>
@@ -21595,7 +21516,7 @@
               <a:buNone/>
             </a:pPr>
             <a:r>
-              <a:rPr lang="en-US" sz="4000" dirty="0">
+              <a:rPr lang="en-US" sz="4000" b="1" dirty="0">
                 <a:solidFill>
                   <a:srgbClr val="111111"/>
                 </a:solidFill>
@@ -21603,7 +21524,24 @@
                 <a:ea typeface="Times New Roman" pitchFamily="34" charset="-122"/>
                 <a:cs typeface="Times New Roman" pitchFamily="34" charset="-120"/>
               </a:rPr>
-              <a:t>Give two causes of the modern demographic explosion.</a:t>
+              <a:t>Aim of migration laws: </a:t>
+            </a:r>
+            <a:pPr algn="l" indent="0" marL="0">
+              <a:spcAft>
+                <a:spcPts val="800"/>
+              </a:spcAft>
+              <a:buNone/>
+            </a:pPr>
+            <a:r>
+              <a:rPr lang="en-US" sz="4000" dirty="0">
+                <a:solidFill>
+                  <a:srgbClr val="111111"/>
+                </a:solidFill>
+                <a:latin typeface="Times New Roman" pitchFamily="34" charset="0"/>
+                <a:ea typeface="Times New Roman" pitchFamily="34" charset="-122"/>
+                <a:cs typeface="Times New Roman" pitchFamily="34" charset="-120"/>
+              </a:rPr>
+              <a:t>Relaxed laws help to fill labour shortages and slow the ageing of the population. Restrictive laws aim to protect jobs, services and security.</a:t>
             </a:r>
             <a:endParaRPr lang="en-US" sz="4000" dirty="0"/>
           </a:p>
@@ -21780,7 +21718,7 @@
                 <a:ea typeface="Times New Roman" pitchFamily="34" charset="-122"/>
                 <a:cs typeface="Times New Roman" pitchFamily="34" charset="-120"/>
               </a:rPr>
-              <a:t>Expected Answer</a:t>
+              <a:t>Evaluation 1</a:t>
             </a:r>
             <a:endParaRPr lang="en-US" sz="3600" dirty="0"/>
           </a:p>
@@ -21822,7 +21760,7 @@
                 <a:ea typeface="Times New Roman" pitchFamily="34" charset="-122"/>
                 <a:cs typeface="Times New Roman" pitchFamily="34" charset="-120"/>
               </a:rPr>
-              <a:t>Better medicine and sanitation, more food (Green Revolution), high birth rates in developing countries (any two).</a:t>
+              <a:t>Give two causes of the modern demographic explosion.</a:t>
             </a:r>
             <a:endParaRPr lang="en-US" sz="4000" dirty="0"/>
           </a:p>
@@ -21999,7 +21937,7 @@
                 <a:ea typeface="Times New Roman" pitchFamily="34" charset="-122"/>
                 <a:cs typeface="Times New Roman" pitchFamily="34" charset="-120"/>
               </a:rPr>
-              <a:t>Evaluation 2</a:t>
+              <a:t>Expected Answer</a:t>
             </a:r>
             <a:endParaRPr lang="en-US" sz="3600" dirty="0"/>
           </a:p>
@@ -22041,7 +21979,7 @@
                 <a:ea typeface="Times New Roman" pitchFamily="34" charset="-122"/>
                 <a:cs typeface="Times New Roman" pitchFamily="34" charset="-120"/>
               </a:rPr>
-              <a:t>Why would Japan adopt a pro-natalist policy and Niger an anti-natalist policy?</a:t>
+              <a:t>Better medicine and sanitation, more food (Green Revolution), high birth rates in developing countries (any two).</a:t>
             </a:r>
             <a:endParaRPr lang="en-US" sz="4000" dirty="0"/>
           </a:p>
@@ -22218,7 +22156,7 @@
                 <a:ea typeface="Times New Roman" pitchFamily="34" charset="-122"/>
                 <a:cs typeface="Times New Roman" pitchFamily="34" charset="-120"/>
               </a:rPr>
-              <a:t>Expected Answer</a:t>
+              <a:t>Evaluation 2</a:t>
             </a:r>
             <a:endParaRPr lang="en-US" sz="3600" dirty="0"/>
           </a:p>
@@ -22260,7 +22198,7 @@
                 <a:ea typeface="Times New Roman" pitchFamily="34" charset="-122"/>
                 <a:cs typeface="Times New Roman" pitchFamily="34" charset="-120"/>
               </a:rPr>
-              <a:t>Japan has low births and an ageing population; Niger has very high births and rapid growth.</a:t>
+              <a:t>Why would Japan adopt a pro-natalist policy and Niger an anti-natalist policy?</a:t>
             </a:r>
             <a:endParaRPr lang="en-US" sz="4000" dirty="0"/>
           </a:p>
@@ -22703,7 +22641,7 @@
                 <a:ea typeface="Calibri" pitchFamily="34" charset="-122"/>
                 <a:cs typeface="Calibri" pitchFamily="34" charset="-120"/>
               </a:rPr>
-              <a:t>REMEDIATION</a:t>
+              <a:t>FORMATIVE EVALUATION</a:t>
             </a:r>
             <a:endParaRPr lang="en-US" sz="1400" dirty="0"/>
           </a:p>
@@ -22726,7 +22664,7 @@
         <p:spPr>
           <a:xfrm>
             <a:off x="0" y="658368"/>
-            <a:ext cx="1463040" cy="5833872"/>
+            <a:ext cx="5120640" cy="5833872"/>
           </a:xfrm>
           <a:prstGeom prst="rect">
             <a:avLst/>
@@ -22741,8 +22679,8 @@
         </p:nvSpPr>
         <p:spPr>
           <a:xfrm>
-            <a:off x="1691640" y="1005840"/>
-            <a:ext cx="10180015" cy="731520"/>
+            <a:off x="5349240" y="1005840"/>
+            <a:ext cx="6522415" cy="731520"/>
           </a:xfrm>
           <a:prstGeom prst="rect">
             <a:avLst/>
@@ -22768,7 +22706,7 @@
                 <a:ea typeface="Times New Roman" pitchFamily="34" charset="-122"/>
                 <a:cs typeface="Times New Roman" pitchFamily="34" charset="-120"/>
               </a:rPr>
-              <a:t>Remediation</a:t>
+              <a:t>Expected Answer</a:t>
             </a:r>
             <a:endParaRPr lang="en-US" sz="3600" dirty="0"/>
           </a:p>
@@ -22782,8 +22720,8 @@
         </p:nvSpPr>
         <p:spPr>
           <a:xfrm>
-            <a:off x="1691640" y="1783080"/>
-            <a:ext cx="10180015" cy="4663440"/>
+            <a:off x="5349240" y="1783080"/>
+            <a:ext cx="6522415" cy="4663440"/>
           </a:xfrm>
           <a:prstGeom prst="rect">
             <a:avLst/>
@@ -22802,7 +22740,7 @@
               <a:buNone/>
             </a:pPr>
             <a:r>
-              <a:rPr lang="en-US" sz="4000" b="1" dirty="0">
+              <a:rPr lang="en-US" sz="4000" dirty="0">
                 <a:solidFill>
                   <a:srgbClr val="111111"/>
                 </a:solidFill>
@@ -22810,73 +22748,7 @@
                 <a:ea typeface="Times New Roman" pitchFamily="34" charset="-122"/>
                 <a:cs typeface="Times New Roman" pitchFamily="34" charset="-120"/>
               </a:rPr>
-              <a:t>Fill in the blanks:</a:t>
-            </a:r>
-            <a:endParaRPr lang="en-US" sz="4000" dirty="0"/>
-          </a:p>
-          <a:p>
-            <a:pPr algn="l" marL="342900" indent="-342900">
-              <a:spcAft>
-                <a:spcPts val="800"/>
-              </a:spcAft>
-              <a:buSzPct val="100000"/>
-              <a:buFont typeface="+mj-lt"/>
-              <a:buAutoNum type="arabicPeriod" startAt="1"/>
-            </a:pPr>
-            <a:r>
-              <a:rPr lang="en-US" sz="4000" dirty="0">
-                <a:solidFill>
-                  <a:srgbClr val="111111"/>
-                </a:solidFill>
-                <a:latin typeface="Times New Roman" pitchFamily="34" charset="0"/>
-                <a:ea typeface="Times New Roman" pitchFamily="34" charset="-122"/>
-                <a:cs typeface="Times New Roman" pitchFamily="34" charset="-120"/>
-              </a:rPr>
-              <a:t>A policy that encourages births is ______.</a:t>
-            </a:r>
-            <a:endParaRPr lang="en-US" sz="4000" dirty="0"/>
-          </a:p>
-          <a:p>
-            <a:pPr algn="l" marL="342900" indent="-342900">
-              <a:spcAft>
-                <a:spcPts val="800"/>
-              </a:spcAft>
-              <a:buSzPct val="100000"/>
-              <a:buFont typeface="+mj-lt"/>
-              <a:buAutoNum type="arabicPeriod" startAt="1"/>
-            </a:pPr>
-            <a:r>
-              <a:rPr lang="en-US" sz="4000" dirty="0">
-                <a:solidFill>
-                  <a:srgbClr val="111111"/>
-                </a:solidFill>
-                <a:latin typeface="Times New Roman" pitchFamily="34" charset="0"/>
-                <a:ea typeface="Times New Roman" pitchFamily="34" charset="-122"/>
-                <a:cs typeface="Times New Roman" pitchFamily="34" charset="-120"/>
-              </a:rPr>
-              <a:t>China's one-child policy lasted until ______.</a:t>
-            </a:r>
-            <a:endParaRPr lang="en-US" sz="4000" dirty="0"/>
-          </a:p>
-          <a:p>
-            <a:pPr algn="l" marL="342900" indent="-342900">
-              <a:spcAft>
-                <a:spcPts val="800"/>
-              </a:spcAft>
-              <a:buSzPct val="100000"/>
-              <a:buFont typeface="+mj-lt"/>
-              <a:buAutoNum type="arabicPeriod" startAt="1"/>
-            </a:pPr>
-            <a:r>
-              <a:rPr lang="en-US" sz="4000" dirty="0">
-                <a:solidFill>
-                  <a:srgbClr val="111111"/>
-                </a:solidFill>
-                <a:latin typeface="Times New Roman" pitchFamily="34" charset="0"/>
-                <a:ea typeface="Times New Roman" pitchFamily="34" charset="-122"/>
-                <a:cs typeface="Times New Roman" pitchFamily="34" charset="-120"/>
-              </a:rPr>
-              <a:t>Canada selects immigrants with a ______ system.</a:t>
+              <a:t>Japan has low births and an ageing population; Niger has very high births and rapid growth.</a:t>
             </a:r>
             <a:endParaRPr lang="en-US" sz="4000" dirty="0"/>
           </a:p>
@@ -22988,7 +22860,7 @@
                 <a:ea typeface="Calibri" pitchFamily="34" charset="-122"/>
                 <a:cs typeface="Calibri" pitchFamily="34" charset="-120"/>
               </a:rPr>
-              <a:t>HOMEWORK</a:t>
+              <a:t>REMEDIATION</a:t>
             </a:r>
             <a:endParaRPr lang="en-US" sz="1400" dirty="0"/>
           </a:p>
@@ -23011,7 +22883,7 @@
         <p:spPr>
           <a:xfrm>
             <a:off x="0" y="658368"/>
-            <a:ext cx="5120640" cy="5833872"/>
+            <a:ext cx="1463040" cy="5833872"/>
           </a:xfrm>
           <a:prstGeom prst="rect">
             <a:avLst/>
@@ -23026,8 +22898,8 @@
         </p:nvSpPr>
         <p:spPr>
           <a:xfrm>
-            <a:off x="5349240" y="1005840"/>
-            <a:ext cx="6522415" cy="731520"/>
+            <a:off x="1691640" y="1005840"/>
+            <a:ext cx="10180015" cy="731520"/>
           </a:xfrm>
           <a:prstGeom prst="rect">
             <a:avLst/>
@@ -23053,7 +22925,7 @@
                 <a:ea typeface="Times New Roman" pitchFamily="34" charset="-122"/>
                 <a:cs typeface="Times New Roman" pitchFamily="34" charset="-120"/>
               </a:rPr>
-              <a:t>Homework</a:t>
+              <a:t>Remediation</a:t>
             </a:r>
             <a:endParaRPr lang="en-US" sz="3600" dirty="0"/>
           </a:p>
@@ -23067,8 +22939,8 @@
         </p:nvSpPr>
         <p:spPr>
           <a:xfrm>
-            <a:off x="5349240" y="1783080"/>
-            <a:ext cx="6522415" cy="4663440"/>
+            <a:off x="1691640" y="1783080"/>
+            <a:ext cx="10180015" cy="4663440"/>
           </a:xfrm>
           <a:prstGeom prst="rect">
             <a:avLst/>
@@ -23087,7 +22959,7 @@
               <a:buNone/>
             </a:pPr>
             <a:r>
-              <a:rPr lang="en-US" sz="4000" dirty="0">
+              <a:rPr lang="en-US" sz="4000" b="1" dirty="0">
                 <a:solidFill>
                   <a:srgbClr val="111111"/>
                 </a:solidFill>
@@ -23095,7 +22967,73 @@
                 <a:ea typeface="Times New Roman" pitchFamily="34" charset="-122"/>
                 <a:cs typeface="Times New Roman" pitchFamily="34" charset="-120"/>
               </a:rPr>
-              <a:t>Name the five stages of the demographic transition model.</a:t>
+              <a:t>Fill in the blanks:</a:t>
+            </a:r>
+            <a:endParaRPr lang="en-US" sz="4000" dirty="0"/>
+          </a:p>
+          <a:p>
+            <a:pPr algn="l" marL="342900" indent="-342900">
+              <a:spcAft>
+                <a:spcPts val="800"/>
+              </a:spcAft>
+              <a:buSzPct val="100000"/>
+              <a:buFont typeface="+mj-lt"/>
+              <a:buAutoNum type="arabicPeriod" startAt="1"/>
+            </a:pPr>
+            <a:r>
+              <a:rPr lang="en-US" sz="4000" dirty="0">
+                <a:solidFill>
+                  <a:srgbClr val="111111"/>
+                </a:solidFill>
+                <a:latin typeface="Times New Roman" pitchFamily="34" charset="0"/>
+                <a:ea typeface="Times New Roman" pitchFamily="34" charset="-122"/>
+                <a:cs typeface="Times New Roman" pitchFamily="34" charset="-120"/>
+              </a:rPr>
+              <a:t>A policy that encourages births is ______.</a:t>
+            </a:r>
+            <a:endParaRPr lang="en-US" sz="4000" dirty="0"/>
+          </a:p>
+          <a:p>
+            <a:pPr algn="l" marL="342900" indent="-342900">
+              <a:spcAft>
+                <a:spcPts val="800"/>
+              </a:spcAft>
+              <a:buSzPct val="100000"/>
+              <a:buFont typeface="+mj-lt"/>
+              <a:buAutoNum type="arabicPeriod" startAt="1"/>
+            </a:pPr>
+            <a:r>
+              <a:rPr lang="en-US" sz="4000" dirty="0">
+                <a:solidFill>
+                  <a:srgbClr val="111111"/>
+                </a:solidFill>
+                <a:latin typeface="Times New Roman" pitchFamily="34" charset="0"/>
+                <a:ea typeface="Times New Roman" pitchFamily="34" charset="-122"/>
+                <a:cs typeface="Times New Roman" pitchFamily="34" charset="-120"/>
+              </a:rPr>
+              <a:t>China's one-child policy lasted until ______.</a:t>
+            </a:r>
+            <a:endParaRPr lang="en-US" sz="4000" dirty="0"/>
+          </a:p>
+          <a:p>
+            <a:pPr algn="l" marL="342900" indent="-342900">
+              <a:spcAft>
+                <a:spcPts val="800"/>
+              </a:spcAft>
+              <a:buSzPct val="100000"/>
+              <a:buFont typeface="+mj-lt"/>
+              <a:buAutoNum type="arabicPeriod" startAt="1"/>
+            </a:pPr>
+            <a:r>
+              <a:rPr lang="en-US" sz="4000" dirty="0">
+                <a:solidFill>
+                  <a:srgbClr val="111111"/>
+                </a:solidFill>
+                <a:latin typeface="Times New Roman" pitchFamily="34" charset="0"/>
+                <a:ea typeface="Times New Roman" pitchFamily="34" charset="-122"/>
+                <a:cs typeface="Times New Roman" pitchFamily="34" charset="-120"/>
+              </a:rPr>
+              <a:t>Canada selects immigrants with a ______ system.</a:t>
             </a:r>
             <a:endParaRPr lang="en-US" sz="4000" dirty="0"/>
           </a:p>
@@ -23207,7 +23145,7 @@
                 <a:ea typeface="Calibri" pitchFamily="34" charset="-122"/>
                 <a:cs typeface="Calibri" pitchFamily="34" charset="-120"/>
               </a:rPr>
-              <a:t>NEXT LESSON</a:t>
+              <a:t>HOMEWORK</a:t>
             </a:r>
             <a:endParaRPr lang="en-US" sz="1400" dirty="0"/>
           </a:p>
@@ -23272,7 +23210,7 @@
                 <a:ea typeface="Times New Roman" pitchFamily="34" charset="-122"/>
                 <a:cs typeface="Times New Roman" pitchFamily="34" charset="-120"/>
               </a:rPr>
-              <a:t>Next Lesson</a:t>
+              <a:t>Homework</a:t>
             </a:r>
             <a:endParaRPr lang="en-US" sz="3600" dirty="0"/>
           </a:p>
@@ -23296,17 +23234,17 @@
           <a:ln/>
         </p:spPr>
         <p:txBody>
-          <a:bodyPr wrap="square" lIns="0" tIns="0" rIns="0" bIns="0" rtlCol="0" anchor="ctr"/>
-          <a:lstStyle/>
-          <a:p>
-            <a:pPr algn="ctr" indent="0" marL="0">
+          <a:bodyPr wrap="square" lIns="0" tIns="0" rIns="0" bIns="0" rtlCol="0" anchor="t"/>
+          <a:lstStyle/>
+          <a:p>
+            <a:pPr algn="l" indent="0" marL="0">
               <a:spcAft>
                 <a:spcPts val="800"/>
               </a:spcAft>
               <a:buNone/>
             </a:pPr>
             <a:r>
-              <a:rPr lang="en-US" sz="4000" b="1" dirty="0">
+              <a:rPr lang="en-US" sz="4000" dirty="0">
                 <a:solidFill>
                   <a:srgbClr val="111111"/>
                 </a:solidFill>
@@ -23314,27 +23252,7 @@
                 <a:ea typeface="Times New Roman" pitchFamily="34" charset="-122"/>
                 <a:cs typeface="Times New Roman" pitchFamily="34" charset="-120"/>
               </a:rPr>
-              <a:t>Our next lesson will be on:</a:t>
-            </a:r>
-            <a:endParaRPr lang="en-US" sz="4000" dirty="0"/>
-          </a:p>
-          <a:p>
-            <a:pPr algn="ctr" indent="0" marL="0">
-              <a:spcAft>
-                <a:spcPts val="800"/>
-              </a:spcAft>
-              <a:buNone/>
-            </a:pPr>
-            <a:r>
-              <a:rPr lang="en-US" sz="4000" b="1" dirty="0">
-                <a:solidFill>
-                  <a:srgbClr val="990011"/>
-                </a:solidFill>
-                <a:latin typeface="Times New Roman" pitchFamily="34" charset="0"/>
-                <a:ea typeface="Times New Roman" pitchFamily="34" charset="-122"/>
-                <a:cs typeface="Times New Roman" pitchFamily="34" charset="-120"/>
-              </a:rPr>
-              <a:t>Lesson 12: The Demographic Transition Model</a:t>
+              <a:t>Name the five stages of the demographic transition model.</a:t>
             </a:r>
             <a:endParaRPr lang="en-US" sz="4000" dirty="0"/>
           </a:p>
@@ -23446,22 +23364,46 @@
                 <a:ea typeface="Calibri" pitchFamily="34" charset="-122"/>
                 <a:cs typeface="Calibri" pitchFamily="34" charset="-120"/>
               </a:rPr>
-              <a:t>BILINGUAL GAME</a:t>
+              <a:t>NEXT LESSON</a:t>
             </a:r>
             <a:endParaRPr lang="en-US" sz="1400" dirty="0"/>
           </a:p>
         </p:txBody>
       </p:sp>
-      <p:sp>
-        <p:nvSpPr>
-          <p:cNvPr id="3" name="Text 1"/>
+      <p:pic>
+        <p:nvPicPr>
+          <p:cNvPr id="3" name="Image 0" descr="/home/claude/f4/img/minesec_sheet.png">    </p:cNvPr>
+          <p:cNvPicPr>
+            <a:picLocks noChangeAspect="1"/>
+          </p:cNvPicPr>
+          <p:nvPr/>
+        </p:nvPicPr>
+        <p:blipFill>
+          <a:blip r:embed="rId1"/>
+          <a:stretch>
+            <a:fillRect/>
+          </a:stretch>
+        </p:blipFill>
+        <p:spPr>
+          <a:xfrm>
+            <a:off x="0" y="658368"/>
+            <a:ext cx="5120640" cy="5833872"/>
+          </a:xfrm>
+          <a:prstGeom prst="rect">
+            <a:avLst/>
+          </a:prstGeom>
+        </p:spPr>
+      </p:pic>
+      <p:sp>
+        <p:nvSpPr>
+          <p:cNvPr id="4" name="Text 1"/>
           <p:cNvSpPr/>
           <p:nvPr/>
         </p:nvSpPr>
         <p:spPr>
           <a:xfrm>
-            <a:off x="457200" y="1005840"/>
-            <a:ext cx="11277295" cy="731520"/>
+            <a:off x="5349240" y="1005840"/>
+            <a:ext cx="6522415" cy="731520"/>
           </a:xfrm>
           <a:prstGeom prst="rect">
             <a:avLst/>
@@ -23470,7 +23412,9 @@
           <a:ln/>
         </p:spPr>
         <p:txBody>
-          <a:bodyPr wrap="square" lIns="0" tIns="0" rIns="0" bIns="0" rtlCol="0" anchor="ctr"/>
+          <a:bodyPr wrap="square" lIns="0" tIns="0" rIns="0" bIns="0" rtlCol="0" anchor="ctr">
+            <a:normAutofit/>
+          </a:bodyPr>
           <a:lstStyle/>
           <a:p>
             <a:pPr algn="ctr" indent="0" marL="0">
@@ -23485,6 +23429,219 @@
                 <a:ea typeface="Times New Roman" pitchFamily="34" charset="-122"/>
                 <a:cs typeface="Times New Roman" pitchFamily="34" charset="-120"/>
               </a:rPr>
+              <a:t>Next Lesson</a:t>
+            </a:r>
+            <a:endParaRPr lang="en-US" sz="3600" dirty="0"/>
+          </a:p>
+        </p:txBody>
+      </p:sp>
+      <p:sp>
+        <p:nvSpPr>
+          <p:cNvPr id="5" name="Text 2"/>
+          <p:cNvSpPr/>
+          <p:nvPr/>
+        </p:nvSpPr>
+        <p:spPr>
+          <a:xfrm>
+            <a:off x="5349240" y="1783080"/>
+            <a:ext cx="6522415" cy="4663440"/>
+          </a:xfrm>
+          <a:prstGeom prst="rect">
+            <a:avLst/>
+          </a:prstGeom>
+          <a:noFill/>
+          <a:ln/>
+        </p:spPr>
+        <p:txBody>
+          <a:bodyPr wrap="square" lIns="0" tIns="0" rIns="0" bIns="0" rtlCol="0" anchor="ctr"/>
+          <a:lstStyle/>
+          <a:p>
+            <a:pPr algn="ctr" indent="0" marL="0">
+              <a:spcAft>
+                <a:spcPts val="800"/>
+              </a:spcAft>
+              <a:buNone/>
+            </a:pPr>
+            <a:r>
+              <a:rPr lang="en-US" sz="4000" b="1" dirty="0">
+                <a:solidFill>
+                  <a:srgbClr val="111111"/>
+                </a:solidFill>
+                <a:latin typeface="Times New Roman" pitchFamily="34" charset="0"/>
+                <a:ea typeface="Times New Roman" pitchFamily="34" charset="-122"/>
+                <a:cs typeface="Times New Roman" pitchFamily="34" charset="-120"/>
+              </a:rPr>
+              <a:t>Our next lesson will be on:</a:t>
+            </a:r>
+            <a:endParaRPr lang="en-US" sz="4000" dirty="0"/>
+          </a:p>
+          <a:p>
+            <a:pPr algn="ctr" indent="0" marL="0">
+              <a:spcAft>
+                <a:spcPts val="800"/>
+              </a:spcAft>
+              <a:buNone/>
+            </a:pPr>
+            <a:r>
+              <a:rPr lang="en-US" sz="4000" b="1" dirty="0">
+                <a:solidFill>
+                  <a:srgbClr val="990011"/>
+                </a:solidFill>
+                <a:latin typeface="Times New Roman" pitchFamily="34" charset="0"/>
+                <a:ea typeface="Times New Roman" pitchFamily="34" charset="-122"/>
+                <a:cs typeface="Times New Roman" pitchFamily="34" charset="-120"/>
+              </a:rPr>
+              <a:t>Lesson 12: The Demographic Transition Model</a:t>
+            </a:r>
+            <a:endParaRPr lang="en-US" sz="4000" dirty="0"/>
+          </a:p>
+        </p:txBody>
+      </p:sp>
+      <p:sp>
+        <p:nvSpPr>
+          <p:cNvPr id="25" name="Slide Number Placeholder 0"/>
+          <p:cNvSpPr>
+            <a:spLocks noGrp="1"/>
+          </p:cNvSpPr>
+          <p:nvPr>
+            <p:ph type="sldNum" sz="quarter" idx="4294967295"/>
+          </p:nvPr>
+        </p:nvSpPr>
+        <p:spPr>
+          <a:xfrm>
+            <a:off x="27432" y="91440"/>
+            <a:ext cx="585216" cy="475488"/>
+          </a:xfrm>
+          <a:prstGeom prst="rect">
+            <a:avLst/>
+          </a:prstGeom>
+          <a:extLst>
+            <a:ext uri="{C572A759-6A51-4108-AA02-DFA0A04FC94B}">
+              <ma14:wrappingTextBoxFlag xmlns:ma14="http://schemas.microsoft.com/office/mac/drawingml/2011/main" val="0"/>
+            </a:ext>
+          </a:extLst>
+        </p:spPr>
+        <p:txBody>
+          <a:bodyPr/>
+          <a:lstStyle>
+            <a:lvl1pPr>
+              <a:defRPr sz="2000">
+                <a:solidFill>
+                  <a:srgbClr val="FFFFFF"/>
+                </a:solidFill>
+                <a:latin typeface="Calibri"/>
+                <a:ea typeface="Calibri"/>
+                <a:cs typeface="Calibri"/>
+              </a:defRPr>
+            </a:lvl1pPr>
+          </a:lstStyle>
+          <a:p>
+            <a:pPr algn="ctr"/>
+            <a:fld id="{F7021451-1387-4CA6-816F-3879F97B5CBC}" type="slidenum">
+              <a:rPr b="1" lang="en-US"/>
+              <a:t>63</a:t>
+            </a:fld>
+            <a:endParaRPr lang="en-US"/>
+          </a:p>
+        </p:txBody>
+      </p:sp>
+    </p:spTree>
+  </p:cSld>
+  <p:clrMapOvr>
+    <a:masterClrMapping/>
+  </p:clrMapOvr>
+</p:sld>
+</file>
+
+<file path=ppt/slides/slide64.xml><?xml version="1.0" encoding="utf-8"?>
+<p:sld xmlns:a="http://schemas.openxmlformats.org/drawingml/2006/main" xmlns:r="http://schemas.openxmlformats.org/officeDocument/2006/relationships" xmlns:p="http://schemas.openxmlformats.org/presentationml/2006/main">
+  <p:cSld name="Slide 64">
+    <p:spTree>
+      <p:nvGrpSpPr>
+        <p:cNvPr id="1" name=""/>
+        <p:cNvGrpSpPr/>
+        <p:nvPr/>
+      </p:nvGrpSpPr>
+      <p:grpSpPr>
+        <a:xfrm>
+          <a:off x="0" y="0"/>
+          <a:ext cx="0" cy="0"/>
+          <a:chOff x="0" y="0"/>
+          <a:chExt cx="0" cy="0"/>
+        </a:xfrm>
+      </p:grpSpPr>
+      <p:sp>
+        <p:nvSpPr>
+          <p:cNvPr id="2" name="Text 0"/>
+          <p:cNvSpPr/>
+          <p:nvPr/>
+        </p:nvSpPr>
+        <p:spPr>
+          <a:xfrm>
+            <a:off x="457200" y="713232"/>
+            <a:ext cx="11368735" cy="274320"/>
+          </a:xfrm>
+          <a:prstGeom prst="rect">
+            <a:avLst/>
+          </a:prstGeom>
+          <a:noFill/>
+          <a:ln/>
+        </p:spPr>
+        <p:txBody>
+          <a:bodyPr wrap="square" lIns="0" tIns="0" rIns="0" bIns="0" rtlCol="0" anchor="ctr"/>
+          <a:lstStyle/>
+          <a:p>
+            <a:pPr algn="r" indent="0" marL="0">
+              <a:buNone/>
+            </a:pPr>
+            <a:r>
+              <a:rPr lang="en-US" sz="1400" b="1" dirty="0">
+                <a:solidFill>
+                  <a:srgbClr val="1C3F6E"/>
+                </a:solidFill>
+                <a:latin typeface="Calibri" pitchFamily="34" charset="0"/>
+                <a:ea typeface="Calibri" pitchFamily="34" charset="-122"/>
+                <a:cs typeface="Calibri" pitchFamily="34" charset="-120"/>
+              </a:rPr>
+              <a:t>BILINGUAL GAME</a:t>
+            </a:r>
+            <a:endParaRPr lang="en-US" sz="1400" dirty="0"/>
+          </a:p>
+        </p:txBody>
+      </p:sp>
+      <p:sp>
+        <p:nvSpPr>
+          <p:cNvPr id="3" name="Text 1"/>
+          <p:cNvSpPr/>
+          <p:nvPr/>
+        </p:nvSpPr>
+        <p:spPr>
+          <a:xfrm>
+            <a:off x="457200" y="1005840"/>
+            <a:ext cx="11277295" cy="731520"/>
+          </a:xfrm>
+          <a:prstGeom prst="rect">
+            <a:avLst/>
+          </a:prstGeom>
+          <a:noFill/>
+          <a:ln/>
+        </p:spPr>
+        <p:txBody>
+          <a:bodyPr wrap="square" lIns="0" tIns="0" rIns="0" bIns="0" rtlCol="0" anchor="ctr"/>
+          <a:lstStyle/>
+          <a:p>
+            <a:pPr algn="ctr" indent="0" marL="0">
+              <a:buNone/>
+            </a:pPr>
+            <a:r>
+              <a:rPr lang="en-US" sz="3600" b="1" dirty="0">
+                <a:solidFill>
+                  <a:srgbClr val="990011"/>
+                </a:solidFill>
+                <a:latin typeface="Times New Roman" pitchFamily="34" charset="0"/>
+                <a:ea typeface="Times New Roman" pitchFamily="34" charset="-122"/>
+                <a:cs typeface="Times New Roman" pitchFamily="34" charset="-120"/>
+              </a:rPr>
               <a:t>Bilingual Game (Jeu Bilingue)</a:t>
             </a:r>
             <a:endParaRPr lang="en-US" sz="3600" dirty="0"/>
@@ -23493,7 +23650,7 @@
       </p:sp>
       <p:graphicFrame>
         <p:nvGraphicFramePr>
-          <p:cNvPr id="64" name="Table 0"/>
+          <p:cNvPr id="65" name="Table 0"/>
           <p:cNvGraphicFramePr>
             <a:graphicFrameLocks noGrp="1"/>
           </p:cNvGraphicFramePr>
@@ -24529,7 +24686,7 @@
             <a:pPr algn="ctr"/>
             <a:fld id="{F7021451-1387-4CA6-816F-3879F97B5CBC}" type="slidenum">
               <a:rPr b="1" lang="en-US"/>
-              <a:t>63</a:t>
+              <a:t>64</a:t>
             </a:fld>
             <a:endParaRPr lang="en-US"/>
           </a:p>
@@ -24543,9 +24700,9 @@
 </p:sld>
 </file>
 
-<file path=ppt/slides/slide64.xml><?xml version="1.0" encoding="utf-8"?>
+<file path=ppt/slides/slide65.xml><?xml version="1.0" encoding="utf-8"?>
 <p:sld xmlns:a="http://schemas.openxmlformats.org/drawingml/2006/main" xmlns:r="http://schemas.openxmlformats.org/officeDocument/2006/relationships" xmlns:p="http://schemas.openxmlformats.org/presentationml/2006/main">
-  <p:cSld name="Slide 64">
+  <p:cSld name="Slide 65">
     <p:spTree>
       <p:nvGrpSpPr>
         <p:cNvPr id="1" name=""/>
@@ -24640,7 +24797,7 @@
       </p:sp>
       <p:graphicFrame>
         <p:nvGraphicFramePr>
-          <p:cNvPr id="65" name="Table 0"/>
+          <p:cNvPr id="66" name="Table 0"/>
           <p:cNvGraphicFramePr>
             <a:graphicFrameLocks noGrp="1"/>
           </p:cNvGraphicFramePr>
@@ -25262,7 +25419,7 @@
             <a:pPr algn="ctr"/>
             <a:fld id="{F7021451-1387-4CA6-816F-3879F97B5CBC}" type="slidenum">
               <a:rPr b="1" lang="en-US"/>
-              <a:t>64</a:t>
+              <a:t>65</a:t>
             </a:fld>
             <a:endParaRPr lang="en-US"/>
           </a:p>
@@ -25276,9 +25433,9 @@
 </p:sld>
 </file>
 
-<file path=ppt/slides/slide65.xml><?xml version="1.0" encoding="utf-8"?>
+<file path=ppt/slides/slide66.xml><?xml version="1.0" encoding="utf-8"?>
 <p:sld xmlns:a="http://schemas.openxmlformats.org/drawingml/2006/main" xmlns:r="http://schemas.openxmlformats.org/officeDocument/2006/relationships" xmlns:p="http://schemas.openxmlformats.org/presentationml/2006/main">
-  <p:cSld name="Slide 65">
+  <p:cSld name="Slide 66">
     <p:spTree>
       <p:nvGrpSpPr>
         <p:cNvPr id="1" name=""/>
@@ -25373,7 +25530,7 @@
       </p:sp>
       <p:graphicFrame>
         <p:nvGraphicFramePr>
-          <p:cNvPr id="66" name="Table 0"/>
+          <p:cNvPr id="67" name="Table 0"/>
           <p:cNvGraphicFramePr>
             <a:graphicFrameLocks noGrp="1"/>
           </p:cNvGraphicFramePr>
@@ -25483,7 +25640,7 @@
                           <a:ea typeface="Calibri" pitchFamily="34" charset="-122"/>
                           <a:cs typeface="Calibri" pitchFamily="34" charset="-120"/>
                         </a:rPr>
-                        <a:t>DEFINITIONS; Causes; Consequences; Pro-Natalist Policies; Anti-Natalist Policies: the Chinese Experience; Migration Laws.</a:t>
+                        <a:t>DEFINITIONS; Causes; Consequences; Pro-Natal Policies; Anti-Natal Policies: the Chinese Experience; Migration Laws: the US and Canadian Cases.</a:t>
                       </a:r>
                       <a:endParaRPr lang="en-US" sz="1600" dirty="0">
                         <a:latin typeface="Calibri" charset="0"/>
@@ -26133,331 +26290,6 @@
             <a:pPr algn="ctr"/>
             <a:fld id="{F7021451-1387-4CA6-816F-3879F97B5CBC}" type="slidenum">
               <a:rPr b="1" lang="en-US"/>
-              <a:t>65</a:t>
-            </a:fld>
-            <a:endParaRPr lang="en-US"/>
-          </a:p>
-        </p:txBody>
-      </p:sp>
-    </p:spTree>
-  </p:cSld>
-  <p:clrMapOvr>
-    <a:masterClrMapping/>
-  </p:clrMapOvr>
-</p:sld>
-</file>
-
-<file path=ppt/slides/slide66.xml><?xml version="1.0" encoding="utf-8"?>
-<p:sld xmlns:a="http://schemas.openxmlformats.org/drawingml/2006/main" xmlns:r="http://schemas.openxmlformats.org/officeDocument/2006/relationships" xmlns:p="http://schemas.openxmlformats.org/presentationml/2006/main">
-  <p:cSld name="Slide 66">
-    <p:spTree>
-      <p:nvGrpSpPr>
-        <p:cNvPr id="1" name=""/>
-        <p:cNvGrpSpPr/>
-        <p:nvPr/>
-      </p:nvGrpSpPr>
-      <p:grpSpPr>
-        <a:xfrm>
-          <a:off x="0" y="0"/>
-          <a:ext cx="0" cy="0"/>
-          <a:chOff x="0" y="0"/>
-          <a:chExt cx="0" cy="0"/>
-        </a:xfrm>
-      </p:grpSpPr>
-      <p:sp>
-        <p:nvSpPr>
-          <p:cNvPr id="2" name="Text 0"/>
-          <p:cNvSpPr/>
-          <p:nvPr/>
-        </p:nvSpPr>
-        <p:spPr>
-          <a:xfrm>
-            <a:off x="457200" y="713232"/>
-            <a:ext cx="11368735" cy="274320"/>
-          </a:xfrm>
-          <a:prstGeom prst="rect">
-            <a:avLst/>
-          </a:prstGeom>
-          <a:noFill/>
-          <a:ln/>
-        </p:spPr>
-        <p:txBody>
-          <a:bodyPr wrap="square" lIns="0" tIns="0" rIns="0" bIns="0" rtlCol="0" anchor="ctr"/>
-          <a:lstStyle/>
-          <a:p>
-            <a:pPr algn="r" indent="0" marL="0">
-              <a:buNone/>
-            </a:pPr>
-            <a:r>
-              <a:rPr lang="en-US" sz="1400" b="1" dirty="0">
-                <a:solidFill>
-                  <a:srgbClr val="1C3F6E"/>
-                </a:solidFill>
-                <a:latin typeface="Calibri" pitchFamily="34" charset="0"/>
-                <a:ea typeface="Calibri" pitchFamily="34" charset="-122"/>
-                <a:cs typeface="Calibri" pitchFamily="34" charset="-120"/>
-              </a:rPr>
-              <a:t>TEACHER'S NOTE</a:t>
-            </a:r>
-            <a:endParaRPr lang="en-US" sz="1400" dirty="0"/>
-          </a:p>
-        </p:txBody>
-      </p:sp>
-      <p:pic>
-        <p:nvPicPr>
-          <p:cNvPr id="3" name="Image 0" descr="/home/claude/f4/img/minesec_sheet.png">    </p:cNvPr>
-          <p:cNvPicPr>
-            <a:picLocks noChangeAspect="1"/>
-          </p:cNvPicPr>
-          <p:nvPr/>
-        </p:nvPicPr>
-        <p:blipFill>
-          <a:blip r:embed="rId1"/>
-          <a:stretch>
-            <a:fillRect/>
-          </a:stretch>
-        </p:blipFill>
-        <p:spPr>
-          <a:xfrm>
-            <a:off x="0" y="658368"/>
-            <a:ext cx="3840480" cy="5833872"/>
-          </a:xfrm>
-          <a:prstGeom prst="rect">
-            <a:avLst/>
-          </a:prstGeom>
-        </p:spPr>
-      </p:pic>
-      <p:sp>
-        <p:nvSpPr>
-          <p:cNvPr id="4" name="Text 1"/>
-          <p:cNvSpPr/>
-          <p:nvPr/>
-        </p:nvSpPr>
-        <p:spPr>
-          <a:xfrm>
-            <a:off x="4069080" y="1005840"/>
-            <a:ext cx="7802575" cy="731520"/>
-          </a:xfrm>
-          <a:prstGeom prst="rect">
-            <a:avLst/>
-          </a:prstGeom>
-          <a:noFill/>
-          <a:ln/>
-        </p:spPr>
-        <p:txBody>
-          <a:bodyPr wrap="square" lIns="0" tIns="0" rIns="0" bIns="0" rtlCol="0" anchor="ctr">
-            <a:normAutofit/>
-          </a:bodyPr>
-          <a:lstStyle/>
-          <a:p>
-            <a:pPr algn="ctr" indent="0" marL="0">
-              <a:buNone/>
-            </a:pPr>
-            <a:r>
-              <a:rPr lang="en-US" sz="3600" b="1" dirty="0">
-                <a:solidFill>
-                  <a:srgbClr val="990011"/>
-                </a:solidFill>
-                <a:latin typeface="Times New Roman" pitchFamily="34" charset="0"/>
-                <a:ea typeface="Times New Roman" pitchFamily="34" charset="-122"/>
-                <a:cs typeface="Times New Roman" pitchFamily="34" charset="-120"/>
-              </a:rPr>
-              <a:t>Teacher's Note</a:t>
-            </a:r>
-            <a:endParaRPr lang="en-US" sz="3600" dirty="0"/>
-          </a:p>
-        </p:txBody>
-      </p:sp>
-      <p:sp>
-        <p:nvSpPr>
-          <p:cNvPr id="5" name="Text 2"/>
-          <p:cNvSpPr/>
-          <p:nvPr/>
-        </p:nvSpPr>
-        <p:spPr>
-          <a:xfrm>
-            <a:off x="4069080" y="1783080"/>
-            <a:ext cx="7802575" cy="4663440"/>
-          </a:xfrm>
-          <a:prstGeom prst="rect">
-            <a:avLst/>
-          </a:prstGeom>
-          <a:noFill/>
-          <a:ln/>
-        </p:spPr>
-        <p:txBody>
-          <a:bodyPr wrap="square" lIns="0" tIns="0" rIns="0" bIns="0" rtlCol="0" anchor="t"/>
-          <a:lstStyle/>
-          <a:p>
-            <a:pPr algn="l" marL="342900" indent="-342900">
-              <a:spcAft>
-                <a:spcPts val="800"/>
-              </a:spcAft>
-              <a:buSzPct val="100000"/>
-              <a:buChar char="•"/>
-            </a:pPr>
-            <a:r>
-              <a:rPr lang="en-US" sz="2000" dirty="0">
-                <a:solidFill>
-                  <a:srgbClr val="111111"/>
-                </a:solidFill>
-                <a:latin typeface="Calibri" pitchFamily="34" charset="0"/>
-                <a:ea typeface="Calibri" pitchFamily="34" charset="-122"/>
-                <a:cs typeface="Calibri" pitchFamily="34" charset="-120"/>
-              </a:rPr>
-              <a:t>Timing: Homework correction, plan, objectives 8 min | Recall, situation, action 10 min | 5 activities 30 min | Board summary (copying) 30 min | Evaluation, remediation 10 min | Homework, next lesson 5 min | Logbook 7 min</a:t>
-            </a:r>
-            <a:endParaRPr lang="en-US" sz="2000" dirty="0"/>
-          </a:p>
-          <a:p>
-            <a:pPr algn="l" marL="342900" indent="-342900">
-              <a:spcAft>
-                <a:spcPts val="800"/>
-              </a:spcAft>
-              <a:buSzPct val="100000"/>
-              <a:buChar char="•"/>
-            </a:pPr>
-            <a:r>
-              <a:rPr lang="en-US" sz="2000" dirty="0">
-                <a:solidFill>
-                  <a:srgbClr val="111111"/>
-                </a:solidFill>
-                <a:latin typeface="Calibri" pitchFamily="34" charset="0"/>
-                <a:ea typeface="Calibri" pitchFamily="34" charset="-122"/>
-                <a:cs typeface="Calibri" pitchFamily="34" charset="-120"/>
-              </a:rPr>
-              <a:t>Without the projector (Activity 1): list the causes on the board.</a:t>
-            </a:r>
-            <a:endParaRPr lang="en-US" sz="2000" dirty="0"/>
-          </a:p>
-          <a:p>
-            <a:pPr algn="l" marL="342900" indent="-342900">
-              <a:spcAft>
-                <a:spcPts val="800"/>
-              </a:spcAft>
-              <a:buSzPct val="100000"/>
-              <a:buChar char="•"/>
-            </a:pPr>
-            <a:r>
-              <a:rPr lang="en-US" sz="2000" dirty="0">
-                <a:solidFill>
-                  <a:srgbClr val="111111"/>
-                </a:solidFill>
-                <a:latin typeface="Calibri" pitchFamily="34" charset="0"/>
-                <a:ea typeface="Calibri" pitchFamily="34" charset="-122"/>
-                <a:cs typeface="Calibri" pitchFamily="34" charset="-120"/>
-              </a:rPr>
-              <a:t>Without the projector (Activity 2): draw the two columns.</a:t>
-            </a:r>
-            <a:endParaRPr lang="en-US" sz="2000" dirty="0"/>
-          </a:p>
-          <a:p>
-            <a:pPr algn="l" marL="342900" indent="-342900">
-              <a:spcAft>
-                <a:spcPts val="800"/>
-              </a:spcAft>
-              <a:buSzPct val="100000"/>
-              <a:buChar char="•"/>
-            </a:pPr>
-            <a:r>
-              <a:rPr lang="en-US" sz="2000" dirty="0">
-                <a:solidFill>
-                  <a:srgbClr val="111111"/>
-                </a:solidFill>
-                <a:latin typeface="Calibri" pitchFamily="34" charset="0"/>
-                <a:ea typeface="Calibri" pitchFamily="34" charset="-122"/>
-                <a:cs typeface="Calibri" pitchFamily="34" charset="-120"/>
-              </a:rPr>
-              <a:t>Without the projector (Activity 3): discuss the price of firewood.</a:t>
-            </a:r>
-            <a:endParaRPr lang="en-US" sz="2000" dirty="0"/>
-          </a:p>
-          <a:p>
-            <a:pPr algn="l" marL="342900" indent="-342900">
-              <a:spcAft>
-                <a:spcPts val="800"/>
-              </a:spcAft>
-              <a:buSzPct val="100000"/>
-              <a:buChar char="•"/>
-            </a:pPr>
-            <a:r>
-              <a:rPr lang="en-US" sz="2000" dirty="0">
-                <a:solidFill>
-                  <a:srgbClr val="111111"/>
-                </a:solidFill>
-                <a:latin typeface="Calibri" pitchFamily="34" charset="0"/>
-                <a:ea typeface="Calibri" pitchFamily="34" charset="-122"/>
-                <a:cs typeface="Calibri" pitchFamily="34" charset="-120"/>
-              </a:rPr>
-              <a:t>Without the projector (Activity 4): write the policies in a table.</a:t>
-            </a:r>
-            <a:endParaRPr lang="en-US" sz="2000" dirty="0"/>
-          </a:p>
-          <a:p>
-            <a:pPr algn="l" marL="342900" indent="-342900">
-              <a:spcAft>
-                <a:spcPts val="800"/>
-              </a:spcAft>
-              <a:buSzPct val="100000"/>
-              <a:buChar char="•"/>
-            </a:pPr>
-            <a:r>
-              <a:rPr lang="en-US" sz="2000" dirty="0">
-                <a:solidFill>
-                  <a:srgbClr val="111111"/>
-                </a:solidFill>
-                <a:latin typeface="Calibri" pitchFamily="34" charset="0"/>
-                <a:ea typeface="Calibri" pitchFamily="34" charset="-122"/>
-                <a:cs typeface="Calibri" pitchFamily="34" charset="-120"/>
-              </a:rPr>
-              <a:t>Without the projector (Activity 5): explain the policy.</a:t>
-            </a:r>
-            <a:endParaRPr lang="en-US" sz="2000" dirty="0"/>
-          </a:p>
-        </p:txBody>
-      </p:sp>
-      <p:sp>
-        <p:nvSpPr>
-          <p:cNvPr id="25" name="Slide Number Placeholder 0"/>
-          <p:cNvSpPr>
-            <a:spLocks noGrp="1"/>
-          </p:cNvSpPr>
-          <p:nvPr>
-            <p:ph type="sldNum" sz="quarter" idx="4294967295"/>
-          </p:nvPr>
-        </p:nvSpPr>
-        <p:spPr>
-          <a:xfrm>
-            <a:off x="27432" y="91440"/>
-            <a:ext cx="585216" cy="475488"/>
-          </a:xfrm>
-          <a:prstGeom prst="rect">
-            <a:avLst/>
-          </a:prstGeom>
-          <a:extLst>
-            <a:ext uri="{C572A759-6A51-4108-AA02-DFA0A04FC94B}">
-              <ma14:wrappingTextBoxFlag xmlns:ma14="http://schemas.microsoft.com/office/mac/drawingml/2011/main" val="0"/>
-            </a:ext>
-          </a:extLst>
-        </p:spPr>
-        <p:txBody>
-          <a:bodyPr/>
-          <a:lstStyle>
-            <a:lvl1pPr>
-              <a:defRPr sz="2000">
-                <a:solidFill>
-                  <a:srgbClr val="FFFFFF"/>
-                </a:solidFill>
-                <a:latin typeface="Calibri"/>
-                <a:ea typeface="Calibri"/>
-                <a:cs typeface="Calibri"/>
-              </a:defRPr>
-            </a:lvl1pPr>
-          </a:lstStyle>
-          <a:p>
-            <a:pPr algn="ctr"/>
-            <a:fld id="{F7021451-1387-4CA6-816F-3879F97B5CBC}" type="slidenum">
-              <a:rPr b="1" lang="en-US"/>
               <a:t>66</a:t>
             </a:fld>
             <a:endParaRPr lang="en-US"/>
@@ -26522,7 +26354,7 @@
                 <a:ea typeface="Calibri" pitchFamily="34" charset="-122"/>
                 <a:cs typeface="Calibri" pitchFamily="34" charset="-120"/>
               </a:rPr>
-              <a:t>REFERENCES</a:t>
+              <a:t>TEACHER'S NOTE</a:t>
             </a:r>
             <a:endParaRPr lang="en-US" sz="1400" dirty="0"/>
           </a:p>
@@ -26545,7 +26377,7 @@
         <p:spPr>
           <a:xfrm>
             <a:off x="0" y="658368"/>
-            <a:ext cx="2468880" cy="5833872"/>
+            <a:ext cx="3840480" cy="5833872"/>
           </a:xfrm>
           <a:prstGeom prst="rect">
             <a:avLst/>
@@ -26560,8 +26392,8 @@
         </p:nvSpPr>
         <p:spPr>
           <a:xfrm>
-            <a:off x="2697480" y="1005840"/>
-            <a:ext cx="9174175" cy="731520"/>
+            <a:off x="4069080" y="1005840"/>
+            <a:ext cx="7802575" cy="731520"/>
           </a:xfrm>
           <a:prstGeom prst="rect">
             <a:avLst/>
@@ -26587,7 +26419,7 @@
                 <a:ea typeface="Times New Roman" pitchFamily="34" charset="-122"/>
                 <a:cs typeface="Times New Roman" pitchFamily="34" charset="-120"/>
               </a:rPr>
-              <a:t>References</a:t>
+              <a:t>Teacher's Note</a:t>
             </a:r>
             <a:endParaRPr lang="en-US" sz="3600" dirty="0"/>
           </a:p>
@@ -26601,8 +26433,8 @@
         </p:nvSpPr>
         <p:spPr>
           <a:xfrm>
-            <a:off x="2697480" y="1783080"/>
-            <a:ext cx="9174175" cy="4663440"/>
+            <a:off x="4069080" y="1783080"/>
+            <a:ext cx="7802575" cy="4663440"/>
           </a:xfrm>
           <a:prstGeom prst="rect">
             <a:avLst/>
@@ -26622,7 +26454,7 @@
               <a:buChar char="•"/>
             </a:pPr>
             <a:r>
-              <a:rPr lang="en-US" sz="1800" dirty="0">
+              <a:rPr lang="en-US" sz="2000" dirty="0">
                 <a:solidFill>
                   <a:srgbClr val="111111"/>
                 </a:solidFill>
@@ -26630,9 +26462,9 @@
                 <a:ea typeface="Calibri" pitchFamily="34" charset="-122"/>
                 <a:cs typeface="Calibri" pitchFamily="34" charset="-120"/>
               </a:rPr>
-              <a:t>Geography Syllabus for Sixth Forms (Lower and Upper Sixth), MINESEC, 2019 — Module 4 (Population Geography).</a:t>
-            </a:r>
-            <a:endParaRPr lang="en-US" sz="1800" dirty="0"/>
+              <a:t>Timing: Homework correction, plan, objectives 8 min | Recall, situation, action 10 min | 5 activities 30 min | Board summary (copying) 30 min | Evaluation, remediation 10 min | Homework, next lesson 5 min | Logbook 7 min</a:t>
+            </a:r>
+            <a:endParaRPr lang="en-US" sz="2000" dirty="0"/>
           </a:p>
           <a:p>
             <a:pPr algn="l" marL="342900" indent="-342900">
@@ -26643,7 +26475,7 @@
               <a:buChar char="•"/>
             </a:pPr>
             <a:r>
-              <a:rPr lang="en-US" sz="1800" dirty="0">
+              <a:rPr lang="en-US" sz="2000" dirty="0">
                 <a:solidFill>
                   <a:srgbClr val="111111"/>
                 </a:solidFill>
@@ -26651,9 +26483,9 @@
                 <a:ea typeface="Calibri" pitchFamily="34" charset="-122"/>
                 <a:cs typeface="Calibri" pitchFamily="34" charset="-120"/>
               </a:rPr>
-              <a:t>Teacher's course notes: Mr KAMDEM E., Population Geography (USA), GBHS Garoua, 2026.</a:t>
-            </a:r>
-            <a:endParaRPr lang="en-US" sz="1800" dirty="0"/>
+              <a:t>Without the projector (Activity 1): list the causes on the board.</a:t>
+            </a:r>
+            <a:endParaRPr lang="en-US" sz="2000" dirty="0"/>
           </a:p>
           <a:p>
             <a:pPr algn="l" marL="342900" indent="-342900">
@@ -26664,7 +26496,7 @@
               <a:buChar char="•"/>
             </a:pPr>
             <a:r>
-              <a:rPr lang="en-US" sz="1800" dirty="0">
+              <a:rPr lang="en-US" sz="2000" dirty="0">
                 <a:solidFill>
                   <a:srgbClr val="111111"/>
                 </a:solidFill>
@@ -26672,9 +26504,9 @@
                 <a:ea typeface="Calibri" pitchFamily="34" charset="-122"/>
                 <a:cs typeface="Calibri" pitchFamily="34" charset="-120"/>
               </a:rPr>
-              <a:t>United Nations, World Population Prospects 2024.</a:t>
-            </a:r>
-            <a:endParaRPr lang="en-US" sz="1800" dirty="0"/>
+              <a:t>Without the projector (Activity 2): draw the two columns.</a:t>
+            </a:r>
+            <a:endParaRPr lang="en-US" sz="2000" dirty="0"/>
           </a:p>
           <a:p>
             <a:pPr algn="l" marL="342900" indent="-342900">
@@ -26685,7 +26517,7 @@
               <a:buChar char="•"/>
             </a:pPr>
             <a:r>
-              <a:rPr lang="en-US" sz="1800" dirty="0">
+              <a:rPr lang="en-US" sz="2000" dirty="0">
                 <a:solidFill>
                   <a:srgbClr val="111111"/>
                 </a:solidFill>
@@ -26693,9 +26525,9 @@
                 <a:ea typeface="Calibri" pitchFamily="34" charset="-122"/>
                 <a:cs typeface="Calibri" pitchFamily="34" charset="-120"/>
               </a:rPr>
-              <a:t>Photo, Activity 3: “Charcoal, made from tree branches” by World Bank Photo Collection, CC BY-NC-ND 2.0, via Flickr (https://www.flickr.com/photos/10816734@N03/25644159775)</a:t>
-            </a:r>
-            <a:endParaRPr lang="en-US" sz="1800" dirty="0"/>
+              <a:t>Without the projector (Activity 3): discuss the price of firewood.</a:t>
+            </a:r>
+            <a:endParaRPr lang="en-US" sz="2000" dirty="0"/>
           </a:p>
           <a:p>
             <a:pPr algn="l" marL="342900" indent="-342900">
@@ -26706,7 +26538,7 @@
               <a:buChar char="•"/>
             </a:pPr>
             <a:r>
-              <a:rPr lang="en-US" sz="1800" dirty="0">
+              <a:rPr lang="en-US" sz="2000" dirty="0">
                 <a:solidFill>
                   <a:srgbClr val="111111"/>
                 </a:solidFill>
@@ -26714,9 +26546,9 @@
                 <a:ea typeface="Calibri" pitchFamily="34" charset="-122"/>
                 <a:cs typeface="Calibri" pitchFamily="34" charset="-120"/>
               </a:rPr>
-              <a:t>Photo, Activity 5: “propaganda posters, one child policy” by kattebelletje, CC BY-NC 2.0, via Flickr (https://www.flickr.com/photos/97249369@N00/3349125321)</a:t>
-            </a:r>
-            <a:endParaRPr lang="en-US" sz="1800" dirty="0"/>
+              <a:t>Without the projector (Activity 4): write the policies in a table.</a:t>
+            </a:r>
+            <a:endParaRPr lang="en-US" sz="2000" dirty="0"/>
           </a:p>
           <a:p>
             <a:pPr algn="l" marL="342900" indent="-342900">
@@ -26727,7 +26559,7 @@
               <a:buChar char="•"/>
             </a:pPr>
             <a:r>
-              <a:rPr lang="en-US" sz="1800" dirty="0">
+              <a:rPr lang="en-US" sz="2000" dirty="0">
                 <a:solidFill>
                   <a:srgbClr val="111111"/>
                 </a:solidFill>
@@ -26735,10 +26567,209 @@
                 <a:ea typeface="Calibri" pitchFamily="34" charset="-122"/>
                 <a:cs typeface="Calibri" pitchFamily="34" charset="-120"/>
               </a:rPr>
-              <a:t>Photo, board summary (Improved medical care): “Isatu gets a vaccination for her 5 week old son” by World Bank Photo Collection, CC BY-NC-ND 2.0, via Flickr (https://www.flickr.com/photos/10816734@N03/26372818523)</a:t>
-            </a:r>
-            <a:endParaRPr lang="en-US" sz="1800" dirty="0"/>
-          </a:p>
+              <a:t>Without the projector (Activity 5): explain the policy.</a:t>
+            </a:r>
+            <a:endParaRPr lang="en-US" sz="2000" dirty="0"/>
+          </a:p>
+        </p:txBody>
+      </p:sp>
+      <p:sp>
+        <p:nvSpPr>
+          <p:cNvPr id="25" name="Slide Number Placeholder 0"/>
+          <p:cNvSpPr>
+            <a:spLocks noGrp="1"/>
+          </p:cNvSpPr>
+          <p:nvPr>
+            <p:ph type="sldNum" sz="quarter" idx="4294967295"/>
+          </p:nvPr>
+        </p:nvSpPr>
+        <p:spPr>
+          <a:xfrm>
+            <a:off x="27432" y="91440"/>
+            <a:ext cx="585216" cy="475488"/>
+          </a:xfrm>
+          <a:prstGeom prst="rect">
+            <a:avLst/>
+          </a:prstGeom>
+          <a:extLst>
+            <a:ext uri="{C572A759-6A51-4108-AA02-DFA0A04FC94B}">
+              <ma14:wrappingTextBoxFlag xmlns:ma14="http://schemas.microsoft.com/office/mac/drawingml/2011/main" val="0"/>
+            </a:ext>
+          </a:extLst>
+        </p:spPr>
+        <p:txBody>
+          <a:bodyPr/>
+          <a:lstStyle>
+            <a:lvl1pPr>
+              <a:defRPr sz="2000">
+                <a:solidFill>
+                  <a:srgbClr val="FFFFFF"/>
+                </a:solidFill>
+                <a:latin typeface="Calibri"/>
+                <a:ea typeface="Calibri"/>
+                <a:cs typeface="Calibri"/>
+              </a:defRPr>
+            </a:lvl1pPr>
+          </a:lstStyle>
+          <a:p>
+            <a:pPr algn="ctr"/>
+            <a:fld id="{F7021451-1387-4CA6-816F-3879F97B5CBC}" type="slidenum">
+              <a:rPr b="1" lang="en-US"/>
+              <a:t>67</a:t>
+            </a:fld>
+            <a:endParaRPr lang="en-US"/>
+          </a:p>
+        </p:txBody>
+      </p:sp>
+    </p:spTree>
+  </p:cSld>
+  <p:clrMapOvr>
+    <a:masterClrMapping/>
+  </p:clrMapOvr>
+</p:sld>
+</file>
+
+<file path=ppt/slides/slide68.xml><?xml version="1.0" encoding="utf-8"?>
+<p:sld xmlns:a="http://schemas.openxmlformats.org/drawingml/2006/main" xmlns:r="http://schemas.openxmlformats.org/officeDocument/2006/relationships" xmlns:p="http://schemas.openxmlformats.org/presentationml/2006/main">
+  <p:cSld name="Slide 68">
+    <p:spTree>
+      <p:nvGrpSpPr>
+        <p:cNvPr id="1" name=""/>
+        <p:cNvGrpSpPr/>
+        <p:nvPr/>
+      </p:nvGrpSpPr>
+      <p:grpSpPr>
+        <a:xfrm>
+          <a:off x="0" y="0"/>
+          <a:ext cx="0" cy="0"/>
+          <a:chOff x="0" y="0"/>
+          <a:chExt cx="0" cy="0"/>
+        </a:xfrm>
+      </p:grpSpPr>
+      <p:sp>
+        <p:nvSpPr>
+          <p:cNvPr id="2" name="Text 0"/>
+          <p:cNvSpPr/>
+          <p:nvPr/>
+        </p:nvSpPr>
+        <p:spPr>
+          <a:xfrm>
+            <a:off x="457200" y="713232"/>
+            <a:ext cx="11368735" cy="274320"/>
+          </a:xfrm>
+          <a:prstGeom prst="rect">
+            <a:avLst/>
+          </a:prstGeom>
+          <a:noFill/>
+          <a:ln/>
+        </p:spPr>
+        <p:txBody>
+          <a:bodyPr wrap="square" lIns="0" tIns="0" rIns="0" bIns="0" rtlCol="0" anchor="ctr"/>
+          <a:lstStyle/>
+          <a:p>
+            <a:pPr algn="r" indent="0" marL="0">
+              <a:buNone/>
+            </a:pPr>
+            <a:r>
+              <a:rPr lang="en-US" sz="1400" b="1" dirty="0">
+                <a:solidFill>
+                  <a:srgbClr val="1C3F6E"/>
+                </a:solidFill>
+                <a:latin typeface="Calibri" pitchFamily="34" charset="0"/>
+                <a:ea typeface="Calibri" pitchFamily="34" charset="-122"/>
+                <a:cs typeface="Calibri" pitchFamily="34" charset="-120"/>
+              </a:rPr>
+              <a:t>REFERENCES</a:t>
+            </a:r>
+            <a:endParaRPr lang="en-US" sz="1400" dirty="0"/>
+          </a:p>
+        </p:txBody>
+      </p:sp>
+      <p:pic>
+        <p:nvPicPr>
+          <p:cNvPr id="3" name="Image 0" descr="/home/claude/f4/img/minesec_sheet.png">    </p:cNvPr>
+          <p:cNvPicPr>
+            <a:picLocks noChangeAspect="1"/>
+          </p:cNvPicPr>
+          <p:nvPr/>
+        </p:nvPicPr>
+        <p:blipFill>
+          <a:blip r:embed="rId1"/>
+          <a:stretch>
+            <a:fillRect/>
+          </a:stretch>
+        </p:blipFill>
+        <p:spPr>
+          <a:xfrm>
+            <a:off x="0" y="658368"/>
+            <a:ext cx="2468880" cy="5833872"/>
+          </a:xfrm>
+          <a:prstGeom prst="rect">
+            <a:avLst/>
+          </a:prstGeom>
+        </p:spPr>
+      </p:pic>
+      <p:sp>
+        <p:nvSpPr>
+          <p:cNvPr id="4" name="Text 1"/>
+          <p:cNvSpPr/>
+          <p:nvPr/>
+        </p:nvSpPr>
+        <p:spPr>
+          <a:xfrm>
+            <a:off x="2697480" y="1005840"/>
+            <a:ext cx="9174175" cy="731520"/>
+          </a:xfrm>
+          <a:prstGeom prst="rect">
+            <a:avLst/>
+          </a:prstGeom>
+          <a:noFill/>
+          <a:ln/>
+        </p:spPr>
+        <p:txBody>
+          <a:bodyPr wrap="square" lIns="0" tIns="0" rIns="0" bIns="0" rtlCol="0" anchor="ctr">
+            <a:normAutofit/>
+          </a:bodyPr>
+          <a:lstStyle/>
+          <a:p>
+            <a:pPr algn="ctr" indent="0" marL="0">
+              <a:buNone/>
+            </a:pPr>
+            <a:r>
+              <a:rPr lang="en-US" sz="3600" b="1" dirty="0">
+                <a:solidFill>
+                  <a:srgbClr val="990011"/>
+                </a:solidFill>
+                <a:latin typeface="Times New Roman" pitchFamily="34" charset="0"/>
+                <a:ea typeface="Times New Roman" pitchFamily="34" charset="-122"/>
+                <a:cs typeface="Times New Roman" pitchFamily="34" charset="-120"/>
+              </a:rPr>
+              <a:t>References</a:t>
+            </a:r>
+            <a:endParaRPr lang="en-US" sz="3600" dirty="0"/>
+          </a:p>
+        </p:txBody>
+      </p:sp>
+      <p:sp>
+        <p:nvSpPr>
+          <p:cNvPr id="5" name="Text 2"/>
+          <p:cNvSpPr/>
+          <p:nvPr/>
+        </p:nvSpPr>
+        <p:spPr>
+          <a:xfrm>
+            <a:off x="2697480" y="1783080"/>
+            <a:ext cx="9174175" cy="4663440"/>
+          </a:xfrm>
+          <a:prstGeom prst="rect">
+            <a:avLst/>
+          </a:prstGeom>
+          <a:noFill/>
+          <a:ln/>
+        </p:spPr>
+        <p:txBody>
+          <a:bodyPr wrap="square" lIns="0" tIns="0" rIns="0" bIns="0" rtlCol="0" anchor="t"/>
+          <a:lstStyle/>
           <a:p>
             <a:pPr algn="l" marL="342900" indent="-342900">
               <a:spcAft>
@@ -26756,6 +26787,132 @@
                 <a:ea typeface="Calibri" pitchFamily="34" charset="-122"/>
                 <a:cs typeface="Calibri" pitchFamily="34" charset="-120"/>
               </a:rPr>
+              <a:t>Geography Syllabus for Sixth Forms (Lower and Upper Sixth), MINESEC, 2019 — Module 4 (Population Geography).</a:t>
+            </a:r>
+            <a:endParaRPr lang="en-US" sz="1800" dirty="0"/>
+          </a:p>
+          <a:p>
+            <a:pPr algn="l" marL="342900" indent="-342900">
+              <a:spcAft>
+                <a:spcPts val="800"/>
+              </a:spcAft>
+              <a:buSzPct val="100000"/>
+              <a:buChar char="•"/>
+            </a:pPr>
+            <a:r>
+              <a:rPr lang="en-US" sz="1800" dirty="0">
+                <a:solidFill>
+                  <a:srgbClr val="111111"/>
+                </a:solidFill>
+                <a:latin typeface="Calibri" pitchFamily="34" charset="0"/>
+                <a:ea typeface="Calibri" pitchFamily="34" charset="-122"/>
+                <a:cs typeface="Calibri" pitchFamily="34" charset="-120"/>
+              </a:rPr>
+              <a:t>Teacher's course notes: Mr KAMDEM E., Population Geography (USA), GBHS Garoua, 2026.</a:t>
+            </a:r>
+            <a:endParaRPr lang="en-US" sz="1800" dirty="0"/>
+          </a:p>
+          <a:p>
+            <a:pPr algn="l" marL="342900" indent="-342900">
+              <a:spcAft>
+                <a:spcPts val="800"/>
+              </a:spcAft>
+              <a:buSzPct val="100000"/>
+              <a:buChar char="•"/>
+            </a:pPr>
+            <a:r>
+              <a:rPr lang="en-US" sz="1800" dirty="0">
+                <a:solidFill>
+                  <a:srgbClr val="111111"/>
+                </a:solidFill>
+                <a:latin typeface="Calibri" pitchFamily="34" charset="0"/>
+                <a:ea typeface="Calibri" pitchFamily="34" charset="-122"/>
+                <a:cs typeface="Calibri" pitchFamily="34" charset="-120"/>
+              </a:rPr>
+              <a:t>United Nations, World Population Prospects 2024.</a:t>
+            </a:r>
+            <a:endParaRPr lang="en-US" sz="1800" dirty="0"/>
+          </a:p>
+          <a:p>
+            <a:pPr algn="l" marL="342900" indent="-342900">
+              <a:spcAft>
+                <a:spcPts val="800"/>
+              </a:spcAft>
+              <a:buSzPct val="100000"/>
+              <a:buChar char="•"/>
+            </a:pPr>
+            <a:r>
+              <a:rPr lang="en-US" sz="1800" dirty="0">
+                <a:solidFill>
+                  <a:srgbClr val="111111"/>
+                </a:solidFill>
+                <a:latin typeface="Calibri" pitchFamily="34" charset="0"/>
+                <a:ea typeface="Calibri" pitchFamily="34" charset="-122"/>
+                <a:cs typeface="Calibri" pitchFamily="34" charset="-120"/>
+              </a:rPr>
+              <a:t>Photo, Activity 3: “Charcoal, made from tree branches” by World Bank Photo Collection, CC BY-NC-ND 2.0, via Flickr (https://www.flickr.com/photos/10816734@N03/25644159775)</a:t>
+            </a:r>
+            <a:endParaRPr lang="en-US" sz="1800" dirty="0"/>
+          </a:p>
+          <a:p>
+            <a:pPr algn="l" marL="342900" indent="-342900">
+              <a:spcAft>
+                <a:spcPts val="800"/>
+              </a:spcAft>
+              <a:buSzPct val="100000"/>
+              <a:buChar char="•"/>
+            </a:pPr>
+            <a:r>
+              <a:rPr lang="en-US" sz="1800" dirty="0">
+                <a:solidFill>
+                  <a:srgbClr val="111111"/>
+                </a:solidFill>
+                <a:latin typeface="Calibri" pitchFamily="34" charset="0"/>
+                <a:ea typeface="Calibri" pitchFamily="34" charset="-122"/>
+                <a:cs typeface="Calibri" pitchFamily="34" charset="-120"/>
+              </a:rPr>
+              <a:t>Photo, Activity 5: “propaganda posters, one child policy” by kattebelletje, CC BY-NC 2.0, via Flickr (https://www.flickr.com/photos/97249369@N00/3349125321)</a:t>
+            </a:r>
+            <a:endParaRPr lang="en-US" sz="1800" dirty="0"/>
+          </a:p>
+          <a:p>
+            <a:pPr algn="l" marL="342900" indent="-342900">
+              <a:spcAft>
+                <a:spcPts val="800"/>
+              </a:spcAft>
+              <a:buSzPct val="100000"/>
+              <a:buChar char="•"/>
+            </a:pPr>
+            <a:r>
+              <a:rPr lang="en-US" sz="1800" dirty="0">
+                <a:solidFill>
+                  <a:srgbClr val="111111"/>
+                </a:solidFill>
+                <a:latin typeface="Calibri" pitchFamily="34" charset="0"/>
+                <a:ea typeface="Calibri" pitchFamily="34" charset="-122"/>
+                <a:cs typeface="Calibri" pitchFamily="34" charset="-120"/>
+              </a:rPr>
+              <a:t>Photo, board summary (Improved medical care): “Isatu gets a vaccination for her 5 week old son” by World Bank Photo Collection, CC BY-NC-ND 2.0, via Flickr (https://www.flickr.com/photos/10816734@N03/26372818523)</a:t>
+            </a:r>
+            <a:endParaRPr lang="en-US" sz="1800" dirty="0"/>
+          </a:p>
+          <a:p>
+            <a:pPr algn="l" marL="342900" indent="-342900">
+              <a:spcAft>
+                <a:spcPts val="800"/>
+              </a:spcAft>
+              <a:buSzPct val="100000"/>
+              <a:buChar char="•"/>
+            </a:pPr>
+            <a:r>
+              <a:rPr lang="en-US" sz="1800" dirty="0">
+                <a:solidFill>
+                  <a:srgbClr val="111111"/>
+                </a:solidFill>
+                <a:latin typeface="Calibri" pitchFamily="34" charset="0"/>
+                <a:ea typeface="Calibri" pitchFamily="34" charset="-122"/>
+                <a:cs typeface="Calibri" pitchFamily="34" charset="-120"/>
+              </a:rPr>
               <a:t>Diagrams and animations: drawn for this lesson (Geography Department).</a:t>
             </a:r>
             <a:endParaRPr lang="en-US" sz="1800" dirty="0"/>
@@ -26804,7 +26961,7 @@
             <a:pPr algn="ctr"/>
             <a:fld id="{F7021451-1387-4CA6-816F-3879F97B5CBC}" type="slidenum">
               <a:rPr b="1" lang="en-US"/>
-              <a:t>67</a:t>
+              <a:t>68</a:t>
             </a:fld>
             <a:endParaRPr lang="en-US"/>
           </a:p>

--- a/lecons/USA/Population Geography/15_USA_POP_L11_The_Modern_Demographic_Explosion_and_Population_Policies.pptx
+++ b/lecons/USA/Population Geography/15_USA_POP_L11_The_Modern_Demographic_Explosion_and_Population_Policies.pptx
@@ -20281,7 +20281,7 @@
         <p:spPr>
           <a:xfrm>
             <a:off x="0" y="658368"/>
-            <a:ext cx="5120640" cy="5833872"/>
+            <a:ext cx="3840480" cy="5833872"/>
           </a:xfrm>
           <a:prstGeom prst="rect">
             <a:avLst/>
@@ -20296,8 +20296,8 @@
         </p:nvSpPr>
         <p:spPr>
           <a:xfrm>
-            <a:off x="5349240" y="1005840"/>
-            <a:ext cx="6522415" cy="731520"/>
+            <a:off x="4069080" y="1005840"/>
+            <a:ext cx="7802575" cy="731520"/>
           </a:xfrm>
           <a:prstGeom prst="rect">
             <a:avLst/>
@@ -20337,8 +20337,8 @@
         </p:nvSpPr>
         <p:spPr>
           <a:xfrm>
-            <a:off x="5349240" y="1737360"/>
-            <a:ext cx="6522415" cy="457200"/>
+            <a:off x="4069080" y="1737360"/>
+            <a:ext cx="7802575" cy="457200"/>
           </a:xfrm>
           <a:prstGeom prst="rect">
             <a:avLst/>
@@ -20354,7 +20354,7 @@
               <a:buNone/>
             </a:pPr>
             <a:r>
-              <a:rPr lang="en-US" sz="2200" b="1" dirty="0">
+              <a:rPr lang="en-US" sz="2600" b="1" dirty="0">
                 <a:solidFill>
                   <a:srgbClr val="990011"/>
                 </a:solidFill>
@@ -20364,7 +20364,7 @@
               </a:rPr>
               <a:t>B) Anti-Natal Policies: the Chinese Experience</a:t>
             </a:r>
-            <a:endParaRPr lang="en-US" sz="2200" dirty="0"/>
+            <a:endParaRPr lang="en-US" sz="2600" dirty="0"/>
           </a:p>
         </p:txBody>
       </p:sp>
@@ -20376,8 +20376,8 @@
         </p:nvSpPr>
         <p:spPr>
           <a:xfrm>
-            <a:off x="5349240" y="2240280"/>
-            <a:ext cx="6522415" cy="4206240"/>
+            <a:off x="4069080" y="2240280"/>
+            <a:ext cx="7802575" cy="4206240"/>
           </a:xfrm>
           <a:prstGeom prst="rect">
             <a:avLst/>
@@ -20421,7 +20421,7 @@
                 <a:ea typeface="Times New Roman" pitchFamily="34" charset="-122"/>
                 <a:cs typeface="Times New Roman" pitchFamily="34" charset="-120"/>
               </a:rPr>
-              <a:t>Growth slowed down sharply, and about 400 million births may have been avoided. This helped China to raise living standards.</a:t>
+              <a:t>Growth slowed down sharply, and according to the Chinese government about 400 million births were avoided. This helped China to raise living standards.</a:t>
             </a:r>
             <a:endParaRPr lang="en-US" sz="4000" dirty="0"/>
           </a:p>
